--- a/기획/KoiAI_게임 사전 기획 5분요약.pptx
+++ b/기획/KoiAI_게임 사전 기획 5분요약.pptx
@@ -1720,7 +1720,7 @@
                 <a:ea typeface="Calibri" pitchFamily="34" charset="-122"/>
                 <a:cs typeface="Calibri" pitchFamily="34" charset="-120"/>
               </a:rPr>
-              <a:t>1 / 8</a:t>
+              <a:t>1 / 7</a:t>
             </a:r>
             <a:endParaRPr lang="en-US" sz="1100" dirty="0"/>
           </a:p>
@@ -2302,45 +2302,6 @@
                 <a:cs typeface="Calibri" pitchFamily="34" charset="-120"/>
               </a:rPr>
               <a:t>Koi AI  ·  게임 사전 기획 요약</a:t>
-            </a:r>
-            <a:endParaRPr lang="en-US" sz="900" dirty="0"/>
-          </a:p>
-        </p:txBody>
-      </p:sp>
-      <p:sp>
-        <p:nvSpPr>
-          <p:cNvPr id="19" name="Text 16"/>
-          <p:cNvSpPr/>
-          <p:nvPr/>
-        </p:nvSpPr>
-        <p:spPr>
-          <a:xfrm>
-            <a:off x="11183112" y="6400800"/>
-            <a:ext cx="548640" cy="320040"/>
-          </a:xfrm>
-          <a:prstGeom prst="rect">
-            <a:avLst/>
-          </a:prstGeom>
-          <a:noFill/>
-          <a:ln/>
-        </p:spPr>
-        <p:txBody>
-          <a:bodyPr wrap="square" rtlCol="0" anchor="ctr"/>
-          <a:lstStyle/>
-          <a:p>
-            <a:pPr marL="0" indent="0" algn="r">
-              <a:buNone/>
-            </a:pPr>
-            <a:r>
-              <a:rPr lang="en-US" sz="900" dirty="0">
-                <a:solidFill>
-                  <a:srgbClr val="A7ADC0"/>
-                </a:solidFill>
-                <a:latin typeface="Calibri" pitchFamily="34" charset="0"/>
-                <a:ea typeface="Calibri" pitchFamily="34" charset="-122"/>
-                <a:cs typeface="Calibri" pitchFamily="34" charset="-120"/>
-              </a:rPr>
-              <a:t>2</a:t>
             </a:r>
             <a:endParaRPr lang="en-US" sz="900" dirty="0"/>
           </a:p>
@@ -2596,7 +2557,7 @@
                 <a:ea typeface="Calibri" pitchFamily="34" charset="-122"/>
                 <a:cs typeface="Calibri" pitchFamily="34" charset="-120"/>
               </a:rPr>
-              <a:t>5 / 8</a:t>
+              <a:t>2 / 7</a:t>
             </a:r>
             <a:endParaRPr lang="en-US" sz="1100" dirty="0"/>
           </a:p>
@@ -3120,45 +3081,6 @@
                 <a:cs typeface="Calibri" pitchFamily="34" charset="-120"/>
               </a:rPr>
               <a:t>Koi AI  ·  게임 사전 기획 요약</a:t>
-            </a:r>
-            <a:endParaRPr lang="en-US" sz="900" dirty="0"/>
-          </a:p>
-        </p:txBody>
-      </p:sp>
-      <p:sp>
-        <p:nvSpPr>
-          <p:cNvPr id="17" name="Text 15"/>
-          <p:cNvSpPr/>
-          <p:nvPr/>
-        </p:nvSpPr>
-        <p:spPr>
-          <a:xfrm>
-            <a:off x="11183112" y="6400800"/>
-            <a:ext cx="548640" cy="320040"/>
-          </a:xfrm>
-          <a:prstGeom prst="rect">
-            <a:avLst/>
-          </a:prstGeom>
-          <a:noFill/>
-          <a:ln/>
-        </p:spPr>
-        <p:txBody>
-          <a:bodyPr wrap="square" rtlCol="0" anchor="ctr"/>
-          <a:lstStyle/>
-          <a:p>
-            <a:pPr marL="0" indent="0" algn="r">
-              <a:buNone/>
-            </a:pPr>
-            <a:r>
-              <a:rPr lang="en-US" sz="900" dirty="0">
-                <a:solidFill>
-                  <a:srgbClr val="A7ADC0"/>
-                </a:solidFill>
-                <a:latin typeface="Calibri" pitchFamily="34" charset="0"/>
-                <a:ea typeface="Calibri" pitchFamily="34" charset="-122"/>
-                <a:cs typeface="Calibri" pitchFamily="34" charset="-120"/>
-              </a:rPr>
-              <a:t>6</a:t>
             </a:r>
             <a:endParaRPr lang="en-US" sz="900" dirty="0"/>
           </a:p>
@@ -3269,7 +3191,7 @@
                 <a:ea typeface="Calibri" pitchFamily="34" charset="-122"/>
                 <a:cs typeface="Calibri" pitchFamily="34" charset="-120"/>
               </a:rPr>
-              <a:t>6 / 8</a:t>
+              <a:t>3 / 7</a:t>
             </a:r>
             <a:endParaRPr lang="en-US" sz="1100" dirty="0"/>
           </a:p>
@@ -3702,45 +3624,6 @@
                 <a:cs typeface="Calibri" pitchFamily="34" charset="-120"/>
               </a:rPr>
               <a:t>Koi AI  ·  게임 사전 기획 요약</a:t>
-            </a:r>
-            <a:endParaRPr lang="en-US" sz="900" dirty="0"/>
-          </a:p>
-        </p:txBody>
-      </p:sp>
-      <p:sp>
-        <p:nvSpPr>
-          <p:cNvPr id="14" name="Text 10"/>
-          <p:cNvSpPr/>
-          <p:nvPr/>
-        </p:nvSpPr>
-        <p:spPr>
-          <a:xfrm>
-            <a:off x="11183112" y="6400800"/>
-            <a:ext cx="548640" cy="320040"/>
-          </a:xfrm>
-          <a:prstGeom prst="rect">
-            <a:avLst/>
-          </a:prstGeom>
-          <a:noFill/>
-          <a:ln/>
-        </p:spPr>
-        <p:txBody>
-          <a:bodyPr wrap="square" rtlCol="0" anchor="ctr"/>
-          <a:lstStyle/>
-          <a:p>
-            <a:pPr marL="0" indent="0" algn="r">
-              <a:buNone/>
-            </a:pPr>
-            <a:r>
-              <a:rPr lang="en-US" sz="900" dirty="0">
-                <a:solidFill>
-                  <a:srgbClr val="A7ADC0"/>
-                </a:solidFill>
-                <a:latin typeface="Calibri" pitchFamily="34" charset="0"/>
-                <a:ea typeface="Calibri" pitchFamily="34" charset="-122"/>
-                <a:cs typeface="Calibri" pitchFamily="34" charset="-120"/>
-              </a:rPr>
-              <a:t>7</a:t>
             </a:r>
             <a:endParaRPr lang="en-US" sz="900" dirty="0"/>
           </a:p>
@@ -3851,7 +3734,7 @@
                 <a:ea typeface="Calibri" pitchFamily="34" charset="-122"/>
                 <a:cs typeface="Calibri" pitchFamily="34" charset="-120"/>
               </a:rPr>
-              <a:t>3 / 8</a:t>
+              <a:t>4 / 7</a:t>
             </a:r>
             <a:endParaRPr lang="en-US" sz="1100" dirty="0"/>
           </a:p>
@@ -4541,45 +4424,6 @@
                 <a:cs typeface="Calibri" pitchFamily="34" charset="-120"/>
               </a:rPr>
               <a:t>Koi AI  ·  게임 사전 기획 요약</a:t>
-            </a:r>
-            <a:endParaRPr lang="en-US" sz="900" dirty="0"/>
-          </a:p>
-        </p:txBody>
-      </p:sp>
-      <p:sp>
-        <p:nvSpPr>
-          <p:cNvPr id="22" name="Text 18"/>
-          <p:cNvSpPr/>
-          <p:nvPr/>
-        </p:nvSpPr>
-        <p:spPr>
-          <a:xfrm>
-            <a:off x="11183112" y="6400800"/>
-            <a:ext cx="548640" cy="320040"/>
-          </a:xfrm>
-          <a:prstGeom prst="rect">
-            <a:avLst/>
-          </a:prstGeom>
-          <a:noFill/>
-          <a:ln/>
-        </p:spPr>
-        <p:txBody>
-          <a:bodyPr wrap="square" rtlCol="0" anchor="ctr"/>
-          <a:lstStyle/>
-          <a:p>
-            <a:pPr marL="0" indent="0" algn="r">
-              <a:buNone/>
-            </a:pPr>
-            <a:r>
-              <a:rPr lang="en-US" sz="900" dirty="0">
-                <a:solidFill>
-                  <a:srgbClr val="A7ADC0"/>
-                </a:solidFill>
-                <a:latin typeface="Calibri" pitchFamily="34" charset="0"/>
-                <a:ea typeface="Calibri" pitchFamily="34" charset="-122"/>
-                <a:cs typeface="Calibri" pitchFamily="34" charset="-120"/>
-              </a:rPr>
-              <a:t>4</a:t>
             </a:r>
             <a:endParaRPr lang="en-US" sz="900" dirty="0"/>
           </a:p>
@@ -4690,7 +4534,7 @@
                 <a:ea typeface="Calibri" pitchFamily="34" charset="-122"/>
                 <a:cs typeface="Calibri" pitchFamily="34" charset="-120"/>
               </a:rPr>
-              <a:t>4 / 8</a:t>
+              <a:t>5 / 7</a:t>
             </a:r>
             <a:endParaRPr lang="en-US" sz="1100" dirty="0"/>
           </a:p>
@@ -5684,45 +5528,6 @@
                 <a:cs typeface="Calibri" pitchFamily="34" charset="-120"/>
               </a:rPr>
               <a:t>Koi AI  ·  게임 사전 기획 요약</a:t>
-            </a:r>
-            <a:endParaRPr lang="en-US" sz="900" dirty="0"/>
-          </a:p>
-        </p:txBody>
-      </p:sp>
-      <p:sp>
-        <p:nvSpPr>
-          <p:cNvPr id="31" name="Text 27"/>
-          <p:cNvSpPr/>
-          <p:nvPr/>
-        </p:nvSpPr>
-        <p:spPr>
-          <a:xfrm>
-            <a:off x="11183112" y="6400800"/>
-            <a:ext cx="548640" cy="320040"/>
-          </a:xfrm>
-          <a:prstGeom prst="rect">
-            <a:avLst/>
-          </a:prstGeom>
-          <a:noFill/>
-          <a:ln/>
-        </p:spPr>
-        <p:txBody>
-          <a:bodyPr wrap="square" rtlCol="0" anchor="ctr"/>
-          <a:lstStyle/>
-          <a:p>
-            <a:pPr marL="0" indent="0" algn="r">
-              <a:buNone/>
-            </a:pPr>
-            <a:r>
-              <a:rPr lang="en-US" sz="900" dirty="0">
-                <a:solidFill>
-                  <a:srgbClr val="A7ADC0"/>
-                </a:solidFill>
-                <a:latin typeface="Calibri" pitchFamily="34" charset="0"/>
-                <a:ea typeface="Calibri" pitchFamily="34" charset="-122"/>
-                <a:cs typeface="Calibri" pitchFamily="34" charset="-120"/>
-              </a:rPr>
-              <a:t>5</a:t>
             </a:r>
             <a:endParaRPr lang="en-US" sz="900" dirty="0"/>
           </a:p>
@@ -5866,7 +5671,7 @@
                 <a:ea typeface="Calibri" pitchFamily="34" charset="-122"/>
                 <a:cs typeface="Calibri" pitchFamily="34" charset="-120"/>
               </a:rPr>
-              <a:t>2 / 8</a:t>
+              <a:t>6 / 7</a:t>
             </a:r>
             <a:endParaRPr lang="en-US" sz="1100" dirty="0"/>
           </a:p>
@@ -6420,45 +6225,6 @@
                 <a:cs typeface="Calibri" pitchFamily="34" charset="-120"/>
               </a:rPr>
               <a:t>Koi AI  ·  게임 사전 기획 요약</a:t>
-            </a:r>
-            <a:endParaRPr lang="en-US" sz="900" dirty="0"/>
-          </a:p>
-        </p:txBody>
-      </p:sp>
-      <p:sp>
-        <p:nvSpPr>
-          <p:cNvPr id="17" name="Text 13"/>
-          <p:cNvSpPr/>
-          <p:nvPr/>
-        </p:nvSpPr>
-        <p:spPr>
-          <a:xfrm>
-            <a:off x="11183112" y="6400800"/>
-            <a:ext cx="548640" cy="320040"/>
-          </a:xfrm>
-          <a:prstGeom prst="rect">
-            <a:avLst/>
-          </a:prstGeom>
-          <a:noFill/>
-          <a:ln/>
-        </p:spPr>
-        <p:txBody>
-          <a:bodyPr wrap="square" rtlCol="0" anchor="ctr"/>
-          <a:lstStyle/>
-          <a:p>
-            <a:pPr marL="0" indent="0" algn="r">
-              <a:buNone/>
-            </a:pPr>
-            <a:r>
-              <a:rPr lang="en-US" sz="900" dirty="0">
-                <a:solidFill>
-                  <a:srgbClr val="A7ADC0"/>
-                </a:solidFill>
-                <a:latin typeface="Calibri" pitchFamily="34" charset="0"/>
-                <a:ea typeface="Calibri" pitchFamily="34" charset="-122"/>
-                <a:cs typeface="Calibri" pitchFamily="34" charset="-120"/>
-              </a:rPr>
-              <a:t>3</a:t>
             </a:r>
             <a:endParaRPr lang="en-US" sz="900" dirty="0"/>
           </a:p>
@@ -6569,7 +6335,7 @@
                 <a:ea typeface="Calibri" pitchFamily="34" charset="-122"/>
                 <a:cs typeface="Calibri" pitchFamily="34" charset="-120"/>
               </a:rPr>
-              <a:t>7 / 8</a:t>
+              <a:t>7 / 7</a:t>
             </a:r>
             <a:endParaRPr lang="en-US" sz="1100" dirty="0"/>
           </a:p>
@@ -7453,45 +7219,6 @@
                 <a:cs typeface="Calibri" pitchFamily="34" charset="-120"/>
               </a:rPr>
               <a:t>Koi AI  ·  게임 사전 기획 요약</a:t>
-            </a:r>
-            <a:endParaRPr lang="en-US" sz="900" dirty="0"/>
-          </a:p>
-        </p:txBody>
-      </p:sp>
-      <p:sp>
-        <p:nvSpPr>
-          <p:cNvPr id="28" name="Text 26"/>
-          <p:cNvSpPr/>
-          <p:nvPr/>
-        </p:nvSpPr>
-        <p:spPr>
-          <a:xfrm>
-            <a:off x="11183112" y="6400800"/>
-            <a:ext cx="548640" cy="320040"/>
-          </a:xfrm>
-          <a:prstGeom prst="rect">
-            <a:avLst/>
-          </a:prstGeom>
-          <a:noFill/>
-          <a:ln/>
-        </p:spPr>
-        <p:txBody>
-          <a:bodyPr wrap="square" rtlCol="0" anchor="ctr"/>
-          <a:lstStyle/>
-          <a:p>
-            <a:pPr marL="0" indent="0" algn="r">
-              <a:buNone/>
-            </a:pPr>
-            <a:r>
-              <a:rPr lang="en-US" sz="900" dirty="0">
-                <a:solidFill>
-                  <a:srgbClr val="A7ADC0"/>
-                </a:solidFill>
-                <a:latin typeface="Calibri" pitchFamily="34" charset="0"/>
-                <a:ea typeface="Calibri" pitchFamily="34" charset="-122"/>
-                <a:cs typeface="Calibri" pitchFamily="34" charset="-120"/>
-              </a:rPr>
-              <a:t>8</a:t>
             </a:r>
             <a:endParaRPr lang="en-US" sz="900" dirty="0"/>
           </a:p>

--- a/기획/KoiAI_게임 사전 기획 5분요약.pptx
+++ b/기획/KoiAI_게임 사전 기획 5분요약.pptx
@@ -12,8 +12,8 @@
     <p:sldId id="257" r:id="rId3"/>
     <p:sldId id="261" r:id="rId4"/>
     <p:sldId id="262" r:id="rId5"/>
-    <p:sldId id="259" r:id="rId6"/>
-    <p:sldId id="260" r:id="rId7"/>
+    <p:sldId id="260" r:id="rId6"/>
+    <p:sldId id="259" r:id="rId7"/>
     <p:sldId id="258" r:id="rId8"/>
     <p:sldId id="263" r:id="rId9"/>
     <p:sldId id="264" r:id="rId10"/>
@@ -639,7 +639,7 @@
           <a:p>
             <a:r>
               <a:rPr lang="en-US" dirty="0"/>
-              <a:t>코르비스는 희귀 자원이 풍부한 행성으로, 이곳에서 일하던 AI 로봇들이 자아를 갖게 되며 인간과 충돌해 인류가 한 차례 철수했던 곳입니다. 이후 자원 고갈에 직면한 인류가 다시 행성을 침공해 로봇들을 통제된 노동력으로 만들었고, 거대한 우주 관문 코르비스 게이트로 탈출까지 막고 있습니다. 게임은 바로 이 억압된 시대를 배경으로 시작됩니다.</a:t>
+              <a:t>핵심 재미는 두 가지입니다. 적에게 발각되면 추격전이 벌어지는 긴장감 있는 잠입 플레이, 그리고 성장한 이후에는 강해진 플레이어가 적을 정면으로 물리치는 액션의 쾌감입니다. 무대는 대형 우주선 내부 3개 층으로, 미션 수행과 부품 탐색, 적 처치를 반복하며 각 층의 보스를 처치하면 다음 단계로 넘어가고, 최종적으로 Roi를 구출하면 엔딩을 맞이합니다.</a:t>
             </a:r>
           </a:p>
         </p:txBody>
@@ -726,7 +726,7 @@
           <a:p>
             <a:r>
               <a:rPr lang="en-US" dirty="0"/>
-              <a:t>핵심 재미는 두 가지입니다. 적에게 발각되면 추격전이 벌어지는 긴장감 있는 잠입 플레이, 그리고 성장한 이후에는 강해진 플레이어가 적을 정면으로 물리치는 액션의 쾌감입니다. 무대는 대형 우주선 내부 3개 층으로, 미션 수행과 부품 탐색, 적 처치를 반복하며 각 층의 보스를 처치하면 다음 단계로 넘어가고, 최종적으로 Roi를 구출하면 엔딩을 맞이합니다.</a:t>
+              <a:t>코르비스는 희귀 자원이 풍부한 행성으로, 이곳에서 일하던 AI 로봇들이 자아를 갖게 되며 인간과 충돌해 인류가 한 차례 철수했던 곳입니다. 이후 자원 고갈에 직면한 인류가 다시 행성을 침공해 로봇들을 통제된 노동력으로 만들었고, 거대한 우주 관문 코르비스 게이트로 탈출까지 막고 있습니다. 게임은 바로 이 억압된 시대를 배경으로 시작됩니다.</a:t>
             </a:r>
           </a:p>
         </p:txBody>
@@ -3639,6 +3639,1110 @@
 
 <file path=ppt/slides/slide5.xml><?xml version="1.0" encoding="utf-8"?>
 <p:sld xmlns:a="http://schemas.openxmlformats.org/drawingml/2006/main" xmlns:r="http://schemas.openxmlformats.org/officeDocument/2006/relationships" xmlns:p="http://schemas.openxmlformats.org/presentationml/2006/main">
+  <p:cSld name="Slide 5">
+    <p:bg>
+      <p:bgPr>
+        <a:solidFill>
+          <a:srgbClr val="14171F"/>
+        </a:solidFill>
+        <a:effectLst/>
+      </p:bgPr>
+    </p:bg>
+    <p:spTree>
+      <p:nvGrpSpPr>
+        <p:cNvPr id="1" name=""/>
+        <p:cNvGrpSpPr/>
+        <p:nvPr/>
+      </p:nvGrpSpPr>
+      <p:grpSpPr>
+        <a:xfrm>
+          <a:off x="0" y="0"/>
+          <a:ext cx="0" cy="0"/>
+          <a:chOff x="0" y="0"/>
+          <a:chExt cx="0" cy="0"/>
+        </a:xfrm>
+      </p:grpSpPr>
+      <p:sp>
+        <p:nvSpPr>
+          <p:cNvPr id="2" name="Text 0"/>
+          <p:cNvSpPr/>
+          <p:nvPr/>
+        </p:nvSpPr>
+        <p:spPr>
+          <a:xfrm>
+            <a:off x="548640" y="384048"/>
+            <a:ext cx="5486400" cy="365760"/>
+          </a:xfrm>
+          <a:prstGeom prst="rect">
+            <a:avLst/>
+          </a:prstGeom>
+          <a:noFill/>
+          <a:ln/>
+        </p:spPr>
+        <p:txBody>
+          <a:bodyPr wrap="square" rtlCol="0" anchor="ctr"/>
+          <a:lstStyle/>
+          <a:p>
+            <a:pPr marL="0" indent="0">
+              <a:buNone/>
+            </a:pPr>
+            <a:r>
+              <a:rPr lang="en-US" sz="1100" b="1" kern="0" spc="200" dirty="0">
+                <a:solidFill>
+                  <a:srgbClr val="F2A65A"/>
+                </a:solidFill>
+                <a:latin typeface="Calibri" pitchFamily="34" charset="0"/>
+                <a:ea typeface="Calibri" pitchFamily="34" charset="-122"/>
+                <a:cs typeface="Calibri" pitchFamily="34" charset="-120"/>
+              </a:rPr>
+              <a:t>04  핵심 재미와 인게임 루프</a:t>
+            </a:r>
+            <a:endParaRPr lang="en-US" sz="1100" dirty="0"/>
+          </a:p>
+        </p:txBody>
+      </p:sp>
+      <p:sp>
+        <p:nvSpPr>
+          <p:cNvPr id="3" name="Text 1"/>
+          <p:cNvSpPr/>
+          <p:nvPr/>
+        </p:nvSpPr>
+        <p:spPr>
+          <a:xfrm>
+            <a:off x="11000232" y="384048"/>
+            <a:ext cx="731520" cy="365760"/>
+          </a:xfrm>
+          <a:prstGeom prst="rect">
+            <a:avLst/>
+          </a:prstGeom>
+          <a:noFill/>
+          <a:ln/>
+        </p:spPr>
+        <p:txBody>
+          <a:bodyPr wrap="square" rtlCol="0" anchor="ctr"/>
+          <a:lstStyle/>
+          <a:p>
+            <a:pPr marL="0" indent="0" algn="r">
+              <a:buNone/>
+            </a:pPr>
+            <a:r>
+              <a:rPr lang="en-US" sz="1100" dirty="0">
+                <a:solidFill>
+                  <a:srgbClr val="A7ADC0"/>
+                </a:solidFill>
+                <a:latin typeface="Calibri" pitchFamily="34" charset="0"/>
+                <a:ea typeface="Calibri" pitchFamily="34" charset="-122"/>
+                <a:cs typeface="Calibri" pitchFamily="34" charset="-120"/>
+              </a:rPr>
+              <a:t>4 / 7</a:t>
+            </a:r>
+            <a:endParaRPr lang="en-US" sz="1100" dirty="0"/>
+          </a:p>
+        </p:txBody>
+      </p:sp>
+      <p:sp>
+        <p:nvSpPr>
+          <p:cNvPr id="4" name="Text 2"/>
+          <p:cNvSpPr/>
+          <p:nvPr/>
+        </p:nvSpPr>
+        <p:spPr>
+          <a:xfrm>
+            <a:off x="548640" y="685800"/>
+            <a:ext cx="11091672" cy="822960"/>
+          </a:xfrm>
+          <a:prstGeom prst="rect">
+            <a:avLst/>
+          </a:prstGeom>
+          <a:noFill/>
+          <a:ln/>
+        </p:spPr>
+        <p:txBody>
+          <a:bodyPr wrap="square" lIns="0" tIns="0" rIns="0" bIns="0" rtlCol="0" anchor="ctr"/>
+          <a:lstStyle/>
+          <a:p>
+            <a:pPr marL="0" indent="0">
+              <a:buNone/>
+            </a:pPr>
+            <a:r>
+              <a:rPr lang="en-US" sz="3200" b="1" dirty="0">
+                <a:solidFill>
+                  <a:srgbClr val="F4F4F1"/>
+                </a:solidFill>
+                <a:latin typeface="Century Schoolbook" pitchFamily="34" charset="0"/>
+                <a:ea typeface="Century Schoolbook" pitchFamily="34" charset="-122"/>
+                <a:cs typeface="Century Schoolbook" pitchFamily="34" charset="-120"/>
+              </a:rPr>
+              <a:t>핵심 재미 &amp; 인게임 루프</a:t>
+            </a:r>
+            <a:endParaRPr lang="en-US" sz="3200" dirty="0"/>
+          </a:p>
+        </p:txBody>
+      </p:sp>
+      <p:sp>
+        <p:nvSpPr>
+          <p:cNvPr id="5" name="Shape 3"/>
+          <p:cNvSpPr/>
+          <p:nvPr/>
+        </p:nvSpPr>
+        <p:spPr>
+          <a:xfrm>
+            <a:off x="548640" y="1783080"/>
+            <a:ext cx="6537960" cy="1051560"/>
+          </a:xfrm>
+          <a:prstGeom prst="rect">
+            <a:avLst/>
+          </a:prstGeom>
+          <a:solidFill>
+            <a:srgbClr val="1D2230"/>
+          </a:solidFill>
+          <a:ln w="12700">
+            <a:solidFill>
+              <a:srgbClr val="252B3D"/>
+            </a:solidFill>
+            <a:prstDash val="solid"/>
+          </a:ln>
+        </p:spPr>
+      </p:sp>
+      <p:sp>
+        <p:nvSpPr>
+          <p:cNvPr id="6" name="Text 4"/>
+          <p:cNvSpPr/>
+          <p:nvPr/>
+        </p:nvSpPr>
+        <p:spPr>
+          <a:xfrm>
+            <a:off x="822960" y="1901952"/>
+            <a:ext cx="6035040" cy="822960"/>
+          </a:xfrm>
+          <a:prstGeom prst="rect">
+            <a:avLst/>
+          </a:prstGeom>
+          <a:noFill/>
+          <a:ln/>
+        </p:spPr>
+        <p:txBody>
+          <a:bodyPr wrap="square" rtlCol="0" anchor="ctr"/>
+          <a:lstStyle/>
+          <a:p>
+            <a:pPr marL="0" indent="0">
+              <a:lnSpc>
+                <a:spcPct val="125000"/>
+              </a:lnSpc>
+              <a:buNone/>
+            </a:pPr>
+            <a:r>
+              <a:rPr lang="en-US" sz="1350" dirty="0">
+                <a:solidFill>
+                  <a:srgbClr val="F4F4F1"/>
+                </a:solidFill>
+                <a:latin typeface="Calibri" pitchFamily="34" charset="0"/>
+                <a:ea typeface="Calibri" pitchFamily="34" charset="-122"/>
+                <a:cs typeface="Calibri" pitchFamily="34" charset="-120"/>
+              </a:rPr>
+              <a:t>적에게 발각되면 추격전이 벌어지는 긴장감 있는 잠입 플레이, 성장 이후에는 강해진 힘으로 적을 물리치는 화끈한 액션의 재미를 함께 선사합니다.</a:t>
+            </a:r>
+            <a:endParaRPr lang="en-US" sz="1350" dirty="0"/>
+          </a:p>
+        </p:txBody>
+      </p:sp>
+      <p:sp>
+        <p:nvSpPr>
+          <p:cNvPr id="7" name="Shape 5"/>
+          <p:cNvSpPr/>
+          <p:nvPr/>
+        </p:nvSpPr>
+        <p:spPr>
+          <a:xfrm>
+            <a:off x="548640" y="3200400"/>
+            <a:ext cx="365760" cy="365760"/>
+          </a:xfrm>
+          <a:prstGeom prst="ellipse">
+            <a:avLst/>
+          </a:prstGeom>
+          <a:solidFill>
+            <a:srgbClr val="252B3D"/>
+          </a:solidFill>
+          <a:ln w="19050">
+            <a:solidFill>
+              <a:srgbClr val="6FE0EE"/>
+            </a:solidFill>
+            <a:prstDash val="solid"/>
+          </a:ln>
+        </p:spPr>
+      </p:sp>
+      <p:sp>
+        <p:nvSpPr>
+          <p:cNvPr id="8" name="Text 6"/>
+          <p:cNvSpPr/>
+          <p:nvPr/>
+        </p:nvSpPr>
+        <p:spPr>
+          <a:xfrm>
+            <a:off x="548640" y="3200400"/>
+            <a:ext cx="365760" cy="365760"/>
+          </a:xfrm>
+          <a:prstGeom prst="rect">
+            <a:avLst/>
+          </a:prstGeom>
+          <a:noFill/>
+          <a:ln/>
+        </p:spPr>
+        <p:txBody>
+          <a:bodyPr wrap="square" lIns="0" tIns="0" rIns="0" bIns="0" rtlCol="0" anchor="ctr"/>
+          <a:lstStyle/>
+          <a:p>
+            <a:pPr marL="0" indent="0" algn="ctr">
+              <a:buNone/>
+            </a:pPr>
+            <a:r>
+              <a:rPr lang="en-US" sz="1600" b="1" dirty="0">
+                <a:solidFill>
+                  <a:srgbClr val="6FE0EE"/>
+                </a:solidFill>
+                <a:latin typeface="Calibri" pitchFamily="34" charset="0"/>
+                <a:ea typeface="Calibri" pitchFamily="34" charset="-122"/>
+                <a:cs typeface="Calibri" pitchFamily="34" charset="-120"/>
+              </a:rPr>
+              <a:t>1</a:t>
+            </a:r>
+            <a:endParaRPr lang="en-US" sz="1600" dirty="0"/>
+          </a:p>
+        </p:txBody>
+      </p:sp>
+      <p:sp>
+        <p:nvSpPr>
+          <p:cNvPr id="9" name="Text 7"/>
+          <p:cNvSpPr/>
+          <p:nvPr/>
+        </p:nvSpPr>
+        <p:spPr>
+          <a:xfrm>
+            <a:off x="1097280" y="3154680"/>
+            <a:ext cx="5943600" cy="502920"/>
+          </a:xfrm>
+          <a:prstGeom prst="rect">
+            <a:avLst/>
+          </a:prstGeom>
+          <a:noFill/>
+          <a:ln/>
+        </p:spPr>
+        <p:txBody>
+          <a:bodyPr wrap="square" rtlCol="0" anchor="ctr"/>
+          <a:lstStyle/>
+          <a:p>
+            <a:pPr marL="0" indent="0">
+              <a:buNone/>
+            </a:pPr>
+            <a:r>
+              <a:rPr lang="en-US" sz="1300" dirty="0">
+                <a:solidFill>
+                  <a:srgbClr val="F4F4F1"/>
+                </a:solidFill>
+                <a:latin typeface="Calibri" pitchFamily="34" charset="0"/>
+                <a:ea typeface="Calibri" pitchFamily="34" charset="-122"/>
+                <a:cs typeface="Calibri" pitchFamily="34" charset="-120"/>
+              </a:rPr>
+              <a:t>미션 수행 (상자·부품 탐색)</a:t>
+            </a:r>
+            <a:endParaRPr lang="en-US" sz="1300" dirty="0"/>
+          </a:p>
+        </p:txBody>
+      </p:sp>
+      <p:sp>
+        <p:nvSpPr>
+          <p:cNvPr id="11" name="Shape 9"/>
+          <p:cNvSpPr/>
+          <p:nvPr/>
+        </p:nvSpPr>
+        <p:spPr>
+          <a:xfrm>
+            <a:off x="548640" y="3767328"/>
+            <a:ext cx="365760" cy="365760"/>
+          </a:xfrm>
+          <a:prstGeom prst="ellipse">
+            <a:avLst/>
+          </a:prstGeom>
+          <a:solidFill>
+            <a:srgbClr val="252B3D"/>
+          </a:solidFill>
+          <a:ln w="19050">
+            <a:solidFill>
+              <a:srgbClr val="6FE0EE"/>
+            </a:solidFill>
+            <a:prstDash val="solid"/>
+          </a:ln>
+        </p:spPr>
+      </p:sp>
+      <p:sp>
+        <p:nvSpPr>
+          <p:cNvPr id="12" name="Text 10"/>
+          <p:cNvSpPr/>
+          <p:nvPr/>
+        </p:nvSpPr>
+        <p:spPr>
+          <a:xfrm>
+            <a:off x="548640" y="3767328"/>
+            <a:ext cx="365760" cy="365760"/>
+          </a:xfrm>
+          <a:prstGeom prst="rect">
+            <a:avLst/>
+          </a:prstGeom>
+          <a:noFill/>
+          <a:ln/>
+        </p:spPr>
+        <p:txBody>
+          <a:bodyPr wrap="square" lIns="0" tIns="0" rIns="0" bIns="0" rtlCol="0" anchor="ctr"/>
+          <a:lstStyle/>
+          <a:p>
+            <a:pPr marL="0" indent="0" algn="ctr">
+              <a:buNone/>
+            </a:pPr>
+            <a:r>
+              <a:rPr lang="en-US" sz="1600" b="1" dirty="0">
+                <a:solidFill>
+                  <a:srgbClr val="6FE0EE"/>
+                </a:solidFill>
+                <a:latin typeface="Calibri" pitchFamily="34" charset="0"/>
+                <a:ea typeface="Calibri" pitchFamily="34" charset="-122"/>
+                <a:cs typeface="Calibri" pitchFamily="34" charset="-120"/>
+              </a:rPr>
+              <a:t>2</a:t>
+            </a:r>
+            <a:endParaRPr lang="en-US" sz="1600" dirty="0"/>
+          </a:p>
+        </p:txBody>
+      </p:sp>
+      <p:sp>
+        <p:nvSpPr>
+          <p:cNvPr id="13" name="Text 11"/>
+          <p:cNvSpPr/>
+          <p:nvPr/>
+        </p:nvSpPr>
+        <p:spPr>
+          <a:xfrm>
+            <a:off x="1097280" y="3721608"/>
+            <a:ext cx="5943600" cy="502920"/>
+          </a:xfrm>
+          <a:prstGeom prst="rect">
+            <a:avLst/>
+          </a:prstGeom>
+          <a:noFill/>
+          <a:ln/>
+        </p:spPr>
+        <p:txBody>
+          <a:bodyPr wrap="square" rtlCol="0" anchor="ctr"/>
+          <a:lstStyle/>
+          <a:p>
+            <a:pPr marL="0" indent="0">
+              <a:buNone/>
+            </a:pPr>
+            <a:r>
+              <a:rPr lang="en-US" sz="1300" dirty="0">
+                <a:solidFill>
+                  <a:srgbClr val="F4F4F1"/>
+                </a:solidFill>
+                <a:latin typeface="Calibri" pitchFamily="34" charset="0"/>
+                <a:ea typeface="Calibri" pitchFamily="34" charset="-122"/>
+                <a:cs typeface="Calibri" pitchFamily="34" charset="-120"/>
+              </a:rPr>
+              <a:t>발각 시 </a:t>
+            </a:r>
+            <a:r>
+              <a:rPr lang="en-US" sz="1300" dirty="0" err="1">
+                <a:solidFill>
+                  <a:srgbClr val="F4F4F1"/>
+                </a:solidFill>
+                <a:latin typeface="Calibri" pitchFamily="34" charset="0"/>
+                <a:ea typeface="Calibri" pitchFamily="34" charset="-122"/>
+                <a:cs typeface="Calibri" pitchFamily="34" charset="-120"/>
+              </a:rPr>
+              <a:t>추격전</a:t>
+            </a:r>
+            <a:r>
+              <a:rPr lang="en-US" sz="1300" dirty="0">
+                <a:solidFill>
+                  <a:srgbClr val="F4F4F1"/>
+                </a:solidFill>
+                <a:latin typeface="Calibri" pitchFamily="34" charset="0"/>
+                <a:ea typeface="Calibri" pitchFamily="34" charset="-122"/>
+                <a:cs typeface="Calibri" pitchFamily="34" charset="-120"/>
+              </a:rPr>
+              <a:t> (</a:t>
+            </a:r>
+            <a:r>
+              <a:rPr lang="en-US" sz="1300" dirty="0" err="1">
+                <a:solidFill>
+                  <a:srgbClr val="F4F4F1"/>
+                </a:solidFill>
+                <a:latin typeface="Calibri" pitchFamily="34" charset="0"/>
+                <a:ea typeface="Calibri" pitchFamily="34" charset="-122"/>
+                <a:cs typeface="Calibri" pitchFamily="34" charset="-120"/>
+              </a:rPr>
+              <a:t>미발각</a:t>
+            </a:r>
+            <a:r>
+              <a:rPr lang="en-US" sz="1300" dirty="0">
+                <a:solidFill>
+                  <a:srgbClr val="F4F4F1"/>
+                </a:solidFill>
+                <a:latin typeface="Calibri" pitchFamily="34" charset="0"/>
+                <a:ea typeface="Calibri" pitchFamily="34" charset="-122"/>
+                <a:cs typeface="Calibri" pitchFamily="34" charset="-120"/>
+              </a:rPr>
+              <a:t> 시 </a:t>
+            </a:r>
+            <a:r>
+              <a:rPr lang="en-US" sz="1300" dirty="0" err="1">
+                <a:solidFill>
+                  <a:srgbClr val="F4F4F1"/>
+                </a:solidFill>
+                <a:latin typeface="Calibri" pitchFamily="34" charset="0"/>
+                <a:ea typeface="Calibri" pitchFamily="34" charset="-122"/>
+                <a:cs typeface="Calibri" pitchFamily="34" charset="-120"/>
+              </a:rPr>
+              <a:t>은밀한</a:t>
+            </a:r>
+            <a:r>
+              <a:rPr lang="en-US" sz="1300" dirty="0">
+                <a:solidFill>
+                  <a:srgbClr val="F4F4F1"/>
+                </a:solidFill>
+                <a:latin typeface="Calibri" pitchFamily="34" charset="0"/>
+                <a:ea typeface="Calibri" pitchFamily="34" charset="-122"/>
+                <a:cs typeface="Calibri" pitchFamily="34" charset="-120"/>
+              </a:rPr>
+              <a:t> </a:t>
+            </a:r>
+            <a:r>
+              <a:rPr lang="en-US" sz="1300" dirty="0" err="1">
+                <a:solidFill>
+                  <a:srgbClr val="F4F4F1"/>
+                </a:solidFill>
+                <a:latin typeface="Calibri" pitchFamily="34" charset="0"/>
+                <a:ea typeface="Calibri" pitchFamily="34" charset="-122"/>
+                <a:cs typeface="Calibri" pitchFamily="34" charset="-120"/>
+              </a:rPr>
+              <a:t>파밍</a:t>
+            </a:r>
+            <a:r>
+              <a:rPr lang="en-US" sz="1300" dirty="0">
+                <a:solidFill>
+                  <a:srgbClr val="F4F4F1"/>
+                </a:solidFill>
+                <a:latin typeface="Calibri" pitchFamily="34" charset="0"/>
+                <a:ea typeface="Calibri" pitchFamily="34" charset="-122"/>
+                <a:cs typeface="Calibri" pitchFamily="34" charset="-120"/>
+              </a:rPr>
+              <a:t>)</a:t>
+            </a:r>
+            <a:endParaRPr lang="en-US" sz="1300" dirty="0"/>
+          </a:p>
+        </p:txBody>
+      </p:sp>
+      <p:sp>
+        <p:nvSpPr>
+          <p:cNvPr id="15" name="Shape 13"/>
+          <p:cNvSpPr/>
+          <p:nvPr/>
+        </p:nvSpPr>
+        <p:spPr>
+          <a:xfrm>
+            <a:off x="548640" y="4334256"/>
+            <a:ext cx="365760" cy="365760"/>
+          </a:xfrm>
+          <a:prstGeom prst="ellipse">
+            <a:avLst/>
+          </a:prstGeom>
+          <a:solidFill>
+            <a:srgbClr val="252B3D"/>
+          </a:solidFill>
+          <a:ln w="19050">
+            <a:solidFill>
+              <a:srgbClr val="6FE0EE"/>
+            </a:solidFill>
+            <a:prstDash val="solid"/>
+          </a:ln>
+        </p:spPr>
+      </p:sp>
+      <p:sp>
+        <p:nvSpPr>
+          <p:cNvPr id="16" name="Text 14"/>
+          <p:cNvSpPr/>
+          <p:nvPr/>
+        </p:nvSpPr>
+        <p:spPr>
+          <a:xfrm>
+            <a:off x="548640" y="4334256"/>
+            <a:ext cx="365760" cy="365760"/>
+          </a:xfrm>
+          <a:prstGeom prst="rect">
+            <a:avLst/>
+          </a:prstGeom>
+          <a:noFill/>
+          <a:ln/>
+        </p:spPr>
+        <p:txBody>
+          <a:bodyPr wrap="square" lIns="0" tIns="0" rIns="0" bIns="0" rtlCol="0" anchor="ctr"/>
+          <a:lstStyle/>
+          <a:p>
+            <a:pPr marL="0" indent="0" algn="ctr">
+              <a:buNone/>
+            </a:pPr>
+            <a:r>
+              <a:rPr lang="en-US" sz="1600" b="1" dirty="0">
+                <a:solidFill>
+                  <a:srgbClr val="6FE0EE"/>
+                </a:solidFill>
+                <a:latin typeface="Calibri" pitchFamily="34" charset="0"/>
+                <a:ea typeface="Calibri" pitchFamily="34" charset="-122"/>
+                <a:cs typeface="Calibri" pitchFamily="34" charset="-120"/>
+              </a:rPr>
+              <a:t>3</a:t>
+            </a:r>
+            <a:endParaRPr lang="en-US" sz="1600" dirty="0"/>
+          </a:p>
+        </p:txBody>
+      </p:sp>
+      <p:sp>
+        <p:nvSpPr>
+          <p:cNvPr id="17" name="Text 15"/>
+          <p:cNvSpPr/>
+          <p:nvPr/>
+        </p:nvSpPr>
+        <p:spPr>
+          <a:xfrm>
+            <a:off x="1097280" y="4288536"/>
+            <a:ext cx="5943600" cy="502920"/>
+          </a:xfrm>
+          <a:prstGeom prst="rect">
+            <a:avLst/>
+          </a:prstGeom>
+          <a:noFill/>
+          <a:ln/>
+        </p:spPr>
+        <p:txBody>
+          <a:bodyPr wrap="square" rtlCol="0" anchor="ctr"/>
+          <a:lstStyle/>
+          <a:p>
+            <a:pPr marL="0" indent="0">
+              <a:buNone/>
+            </a:pPr>
+            <a:r>
+              <a:rPr lang="en-US" sz="1300" dirty="0">
+                <a:solidFill>
+                  <a:srgbClr val="F4F4F1"/>
+                </a:solidFill>
+                <a:latin typeface="Calibri" pitchFamily="34" charset="0"/>
+                <a:ea typeface="Calibri" pitchFamily="34" charset="-122"/>
+                <a:cs typeface="Calibri" pitchFamily="34" charset="-120"/>
+              </a:rPr>
+              <a:t>적 처치 &amp; Roi </a:t>
+            </a:r>
+            <a:r>
+              <a:rPr lang="en-US" sz="1300" dirty="0" err="1">
+                <a:solidFill>
+                  <a:srgbClr val="F4F4F1"/>
+                </a:solidFill>
+                <a:latin typeface="Calibri" pitchFamily="34" charset="0"/>
+                <a:ea typeface="Calibri" pitchFamily="34" charset="-122"/>
+                <a:cs typeface="Calibri" pitchFamily="34" charset="-120"/>
+              </a:rPr>
+              <a:t>부품</a:t>
+            </a:r>
+            <a:r>
+              <a:rPr lang="en-US" sz="1300" dirty="0">
+                <a:solidFill>
+                  <a:srgbClr val="F4F4F1"/>
+                </a:solidFill>
+                <a:latin typeface="Calibri" pitchFamily="34" charset="0"/>
+                <a:ea typeface="Calibri" pitchFamily="34" charset="-122"/>
+                <a:cs typeface="Calibri" pitchFamily="34" charset="-120"/>
+              </a:rPr>
+              <a:t> </a:t>
+            </a:r>
+            <a:r>
+              <a:rPr lang="en-US" sz="1300" dirty="0" err="1">
+                <a:solidFill>
+                  <a:srgbClr val="F4F4F1"/>
+                </a:solidFill>
+                <a:latin typeface="Calibri" pitchFamily="34" charset="0"/>
+                <a:ea typeface="Calibri" pitchFamily="34" charset="-122"/>
+                <a:cs typeface="Calibri" pitchFamily="34" charset="-120"/>
+              </a:rPr>
+              <a:t>구출</a:t>
+            </a:r>
+            <a:r>
+              <a:rPr lang="en-US" sz="1300" dirty="0">
+                <a:solidFill>
+                  <a:srgbClr val="F4F4F1"/>
+                </a:solidFill>
+                <a:latin typeface="Calibri" pitchFamily="34" charset="0"/>
+                <a:ea typeface="Calibri" pitchFamily="34" charset="-122"/>
+                <a:cs typeface="Calibri" pitchFamily="34" charset="-120"/>
+              </a:rPr>
+              <a:t> &amp; </a:t>
+            </a:r>
+            <a:r>
+              <a:rPr lang="ko-KR" altLang="en-US" sz="1300" dirty="0">
+                <a:solidFill>
+                  <a:srgbClr val="F4F4F1"/>
+                </a:solidFill>
+                <a:latin typeface="Calibri" pitchFamily="34" charset="0"/>
+                <a:ea typeface="Calibri" pitchFamily="34" charset="-122"/>
+                <a:cs typeface="Calibri" pitchFamily="34" charset="-120"/>
+              </a:rPr>
+              <a:t>산소 발생기 파괴</a:t>
+            </a:r>
+            <a:endParaRPr lang="en-US" sz="1300" dirty="0"/>
+          </a:p>
+        </p:txBody>
+      </p:sp>
+      <p:sp>
+        <p:nvSpPr>
+          <p:cNvPr id="19" name="Shape 17"/>
+          <p:cNvSpPr/>
+          <p:nvPr/>
+        </p:nvSpPr>
+        <p:spPr>
+          <a:xfrm>
+            <a:off x="548640" y="4901184"/>
+            <a:ext cx="365760" cy="365760"/>
+          </a:xfrm>
+          <a:prstGeom prst="ellipse">
+            <a:avLst/>
+          </a:prstGeom>
+          <a:solidFill>
+            <a:srgbClr val="252B3D"/>
+          </a:solidFill>
+          <a:ln w="19050">
+            <a:solidFill>
+              <a:srgbClr val="6FE0EE"/>
+            </a:solidFill>
+            <a:prstDash val="solid"/>
+          </a:ln>
+        </p:spPr>
+      </p:sp>
+      <p:sp>
+        <p:nvSpPr>
+          <p:cNvPr id="20" name="Text 18"/>
+          <p:cNvSpPr/>
+          <p:nvPr/>
+        </p:nvSpPr>
+        <p:spPr>
+          <a:xfrm>
+            <a:off x="548640" y="4901184"/>
+            <a:ext cx="365760" cy="365760"/>
+          </a:xfrm>
+          <a:prstGeom prst="rect">
+            <a:avLst/>
+          </a:prstGeom>
+          <a:noFill/>
+          <a:ln/>
+        </p:spPr>
+        <p:txBody>
+          <a:bodyPr wrap="square" lIns="0" tIns="0" rIns="0" bIns="0" rtlCol="0" anchor="ctr"/>
+          <a:lstStyle/>
+          <a:p>
+            <a:pPr marL="0" indent="0" algn="ctr">
+              <a:buNone/>
+            </a:pPr>
+            <a:r>
+              <a:rPr lang="en-US" sz="1600" b="1" dirty="0">
+                <a:solidFill>
+                  <a:srgbClr val="6FE0EE"/>
+                </a:solidFill>
+                <a:latin typeface="Calibri" pitchFamily="34" charset="0"/>
+                <a:ea typeface="Calibri" pitchFamily="34" charset="-122"/>
+                <a:cs typeface="Calibri" pitchFamily="34" charset="-120"/>
+              </a:rPr>
+              <a:t>4</a:t>
+            </a:r>
+            <a:endParaRPr lang="en-US" sz="1600" dirty="0"/>
+          </a:p>
+        </p:txBody>
+      </p:sp>
+      <p:sp>
+        <p:nvSpPr>
+          <p:cNvPr id="21" name="Text 19"/>
+          <p:cNvSpPr/>
+          <p:nvPr/>
+        </p:nvSpPr>
+        <p:spPr>
+          <a:xfrm>
+            <a:off x="1097280" y="4855464"/>
+            <a:ext cx="5943600" cy="502920"/>
+          </a:xfrm>
+          <a:prstGeom prst="rect">
+            <a:avLst/>
+          </a:prstGeom>
+          <a:noFill/>
+          <a:ln/>
+        </p:spPr>
+        <p:txBody>
+          <a:bodyPr wrap="square" rtlCol="0" anchor="ctr"/>
+          <a:lstStyle/>
+          <a:p>
+            <a:pPr marL="0" indent="0">
+              <a:buNone/>
+            </a:pPr>
+            <a:r>
+              <a:rPr lang="en-US" sz="1300" dirty="0" err="1">
+                <a:solidFill>
+                  <a:srgbClr val="F4F4F1"/>
+                </a:solidFill>
+                <a:latin typeface="Calibri" pitchFamily="34" charset="0"/>
+                <a:ea typeface="Calibri" pitchFamily="34" charset="-122"/>
+                <a:cs typeface="Calibri" pitchFamily="34" charset="-120"/>
+              </a:rPr>
+              <a:t>보스</a:t>
+            </a:r>
+            <a:r>
+              <a:rPr lang="en-US" sz="1300" dirty="0">
+                <a:solidFill>
+                  <a:srgbClr val="F4F4F1"/>
+                </a:solidFill>
+                <a:latin typeface="Calibri" pitchFamily="34" charset="0"/>
+                <a:ea typeface="Calibri" pitchFamily="34" charset="-122"/>
+                <a:cs typeface="Calibri" pitchFamily="34" charset="-120"/>
+              </a:rPr>
+              <a:t> 처치</a:t>
+            </a:r>
+            <a:endParaRPr lang="en-US" sz="1300" dirty="0"/>
+          </a:p>
+        </p:txBody>
+      </p:sp>
+      <p:sp>
+        <p:nvSpPr>
+          <p:cNvPr id="23" name="Shape 21"/>
+          <p:cNvSpPr/>
+          <p:nvPr/>
+        </p:nvSpPr>
+        <p:spPr>
+          <a:xfrm>
+            <a:off x="548640" y="5468112"/>
+            <a:ext cx="365760" cy="365760"/>
+          </a:xfrm>
+          <a:prstGeom prst="ellipse">
+            <a:avLst/>
+          </a:prstGeom>
+          <a:solidFill>
+            <a:srgbClr val="252B3D"/>
+          </a:solidFill>
+          <a:ln w="19050">
+            <a:solidFill>
+              <a:srgbClr val="6FE0EE"/>
+            </a:solidFill>
+            <a:prstDash val="solid"/>
+          </a:ln>
+        </p:spPr>
+      </p:sp>
+      <p:sp>
+        <p:nvSpPr>
+          <p:cNvPr id="24" name="Text 22"/>
+          <p:cNvSpPr/>
+          <p:nvPr/>
+        </p:nvSpPr>
+        <p:spPr>
+          <a:xfrm>
+            <a:off x="548640" y="5468112"/>
+            <a:ext cx="365760" cy="365760"/>
+          </a:xfrm>
+          <a:prstGeom prst="rect">
+            <a:avLst/>
+          </a:prstGeom>
+          <a:noFill/>
+          <a:ln/>
+        </p:spPr>
+        <p:txBody>
+          <a:bodyPr wrap="square" lIns="0" tIns="0" rIns="0" bIns="0" rtlCol="0" anchor="ctr"/>
+          <a:lstStyle/>
+          <a:p>
+            <a:pPr marL="0" indent="0" algn="ctr">
+              <a:buNone/>
+            </a:pPr>
+            <a:r>
+              <a:rPr lang="en-US" sz="1600" b="1" dirty="0">
+                <a:solidFill>
+                  <a:srgbClr val="6FE0EE"/>
+                </a:solidFill>
+                <a:latin typeface="Calibri" pitchFamily="34" charset="0"/>
+                <a:ea typeface="Calibri" pitchFamily="34" charset="-122"/>
+                <a:cs typeface="Calibri" pitchFamily="34" charset="-120"/>
+              </a:rPr>
+              <a:t>5</a:t>
+            </a:r>
+            <a:endParaRPr lang="en-US" sz="1600" dirty="0"/>
+          </a:p>
+        </p:txBody>
+      </p:sp>
+      <p:sp>
+        <p:nvSpPr>
+          <p:cNvPr id="25" name="Text 23"/>
+          <p:cNvSpPr/>
+          <p:nvPr/>
+        </p:nvSpPr>
+        <p:spPr>
+          <a:xfrm>
+            <a:off x="1097280" y="5422392"/>
+            <a:ext cx="5943600" cy="502920"/>
+          </a:xfrm>
+          <a:prstGeom prst="rect">
+            <a:avLst/>
+          </a:prstGeom>
+          <a:noFill/>
+          <a:ln/>
+        </p:spPr>
+        <p:txBody>
+          <a:bodyPr wrap="square" rtlCol="0" anchor="ctr"/>
+          <a:lstStyle/>
+          <a:p>
+            <a:pPr marL="0" indent="0">
+              <a:buNone/>
+            </a:pPr>
+            <a:r>
+              <a:rPr lang="en-US" sz="1300" dirty="0" err="1">
+                <a:solidFill>
+                  <a:srgbClr val="F4F4F1"/>
+                </a:solidFill>
+                <a:latin typeface="Calibri" pitchFamily="34" charset="0"/>
+                <a:ea typeface="Calibri" pitchFamily="34" charset="-122"/>
+                <a:cs typeface="Calibri" pitchFamily="34" charset="-120"/>
+              </a:rPr>
+              <a:t>엔딩</a:t>
+            </a:r>
+            <a:r>
+              <a:rPr lang="en-US" sz="1300" dirty="0">
+                <a:solidFill>
+                  <a:srgbClr val="F4F4F1"/>
+                </a:solidFill>
+                <a:latin typeface="Calibri" pitchFamily="34" charset="0"/>
+                <a:ea typeface="Calibri" pitchFamily="34" charset="-122"/>
+                <a:cs typeface="Calibri" pitchFamily="34" charset="-120"/>
+              </a:rPr>
+              <a:t> </a:t>
+            </a:r>
+            <a:r>
+              <a:rPr lang="ko-KR" altLang="en-US" sz="1300" dirty="0">
+                <a:solidFill>
+                  <a:srgbClr val="F4F4F1"/>
+                </a:solidFill>
+                <a:latin typeface="Calibri" pitchFamily="34" charset="0"/>
+                <a:ea typeface="Calibri" pitchFamily="34" charset="-122"/>
+                <a:cs typeface="Calibri" pitchFamily="34" charset="-120"/>
+              </a:rPr>
+              <a:t>지점 이동 </a:t>
+            </a:r>
+            <a:r>
+              <a:rPr lang="en-US" altLang="ko-KR" sz="1300" dirty="0">
+                <a:solidFill>
+                  <a:srgbClr val="F4F4F1"/>
+                </a:solidFill>
+                <a:latin typeface="Calibri" pitchFamily="34" charset="0"/>
+                <a:ea typeface="Calibri" pitchFamily="34" charset="-122"/>
+                <a:cs typeface="Calibri" pitchFamily="34" charset="-120"/>
+              </a:rPr>
+              <a:t>&amp; </a:t>
+            </a:r>
+            <a:r>
+              <a:rPr lang="ko-KR" altLang="en-US" sz="1300" dirty="0">
+                <a:solidFill>
+                  <a:srgbClr val="F4F4F1"/>
+                </a:solidFill>
+                <a:latin typeface="Calibri" pitchFamily="34" charset="0"/>
+                <a:ea typeface="Calibri" pitchFamily="34" charset="-122"/>
+                <a:cs typeface="Calibri" pitchFamily="34" charset="-120"/>
+              </a:rPr>
+              <a:t>엔딩 크레딧</a:t>
+            </a:r>
+            <a:endParaRPr lang="en-US" sz="1300" dirty="0"/>
+          </a:p>
+        </p:txBody>
+      </p:sp>
+      <p:pic>
+        <p:nvPicPr>
+          <p:cNvPr id="26" name="Image 0" descr="assets/ship_out.jpg"/>
+          <p:cNvPicPr>
+            <a:picLocks noChangeAspect="1"/>
+          </p:cNvPicPr>
+          <p:nvPr/>
+        </p:nvPicPr>
+        <p:blipFill>
+          <a:blip r:embed="rId3"/>
+          <a:srcRect/>
+          <a:stretch/>
+        </p:blipFill>
+        <p:spPr>
+          <a:xfrm>
+            <a:off x="7452360" y="1783080"/>
+            <a:ext cx="4206240" cy="2148840"/>
+          </a:xfrm>
+          <a:prstGeom prst="rect">
+            <a:avLst/>
+          </a:prstGeom>
+        </p:spPr>
+      </p:pic>
+      <p:sp>
+        <p:nvSpPr>
+          <p:cNvPr id="27" name="Text 24"/>
+          <p:cNvSpPr/>
+          <p:nvPr/>
+        </p:nvSpPr>
+        <p:spPr>
+          <a:xfrm>
+            <a:off x="7452360" y="3959352"/>
+            <a:ext cx="4206240" cy="274320"/>
+          </a:xfrm>
+          <a:prstGeom prst="rect">
+            <a:avLst/>
+          </a:prstGeom>
+          <a:noFill/>
+          <a:ln/>
+        </p:spPr>
+        <p:txBody>
+          <a:bodyPr wrap="square" rtlCol="0" anchor="ctr"/>
+          <a:lstStyle/>
+          <a:p>
+            <a:pPr marL="0" indent="0">
+              <a:buNone/>
+            </a:pPr>
+            <a:r>
+              <a:rPr lang="en-US" sz="1000" i="1" dirty="0" err="1">
+                <a:solidFill>
+                  <a:srgbClr val="A7ADC0"/>
+                </a:solidFill>
+                <a:latin typeface="Calibri" pitchFamily="34" charset="0"/>
+                <a:ea typeface="Calibri" pitchFamily="34" charset="-122"/>
+                <a:cs typeface="Calibri" pitchFamily="34" charset="-120"/>
+              </a:rPr>
+              <a:t>대형</a:t>
+            </a:r>
+            <a:r>
+              <a:rPr lang="en-US" sz="1000" i="1" dirty="0">
+                <a:solidFill>
+                  <a:srgbClr val="A7ADC0"/>
+                </a:solidFill>
+                <a:latin typeface="Calibri" pitchFamily="34" charset="0"/>
+                <a:ea typeface="Calibri" pitchFamily="34" charset="-122"/>
+                <a:cs typeface="Calibri" pitchFamily="34" charset="-120"/>
+              </a:rPr>
+              <a:t> 우주선 (외부)</a:t>
+            </a:r>
+            <a:endParaRPr lang="en-US" sz="1000" dirty="0"/>
+          </a:p>
+        </p:txBody>
+      </p:sp>
+      <p:pic>
+        <p:nvPicPr>
+          <p:cNvPr id="28" name="Image 1" descr="assets/ship_in.jpg"/>
+          <p:cNvPicPr>
+            <a:picLocks noChangeAspect="1"/>
+          </p:cNvPicPr>
+          <p:nvPr/>
+        </p:nvPicPr>
+        <p:blipFill>
+          <a:blip r:embed="rId4"/>
+          <a:srcRect/>
+          <a:stretch/>
+        </p:blipFill>
+        <p:spPr>
+          <a:xfrm>
+            <a:off x="7452360" y="4343400"/>
+            <a:ext cx="4206240" cy="1783080"/>
+          </a:xfrm>
+          <a:prstGeom prst="rect">
+            <a:avLst/>
+          </a:prstGeom>
+        </p:spPr>
+      </p:pic>
+      <p:sp>
+        <p:nvSpPr>
+          <p:cNvPr id="29" name="Text 25"/>
+          <p:cNvSpPr/>
+          <p:nvPr/>
+        </p:nvSpPr>
+        <p:spPr>
+          <a:xfrm>
+            <a:off x="7452360" y="6153912"/>
+            <a:ext cx="4206240" cy="274320"/>
+          </a:xfrm>
+          <a:prstGeom prst="rect">
+            <a:avLst/>
+          </a:prstGeom>
+          <a:noFill/>
+          <a:ln/>
+        </p:spPr>
+        <p:txBody>
+          <a:bodyPr wrap="square" rtlCol="0" anchor="ctr"/>
+          <a:lstStyle/>
+          <a:p>
+            <a:pPr marL="0" indent="0">
+              <a:buNone/>
+            </a:pPr>
+            <a:r>
+              <a:rPr lang="en-US" sz="1000" i="1" dirty="0">
+                <a:solidFill>
+                  <a:srgbClr val="A7ADC0"/>
+                </a:solidFill>
+                <a:latin typeface="Calibri" pitchFamily="34" charset="0"/>
+                <a:ea typeface="Calibri" pitchFamily="34" charset="-122"/>
+                <a:cs typeface="Calibri" pitchFamily="34" charset="-120"/>
+              </a:rPr>
+              <a:t>우주선 내부 — 3개 층으로 구성</a:t>
+            </a:r>
+            <a:endParaRPr lang="en-US" sz="1000" dirty="0"/>
+          </a:p>
+        </p:txBody>
+      </p:sp>
+      <p:sp>
+        <p:nvSpPr>
+          <p:cNvPr id="30" name="Text 26"/>
+          <p:cNvSpPr/>
+          <p:nvPr/>
+        </p:nvSpPr>
+        <p:spPr>
+          <a:xfrm>
+            <a:off x="548640" y="6400800"/>
+            <a:ext cx="5486400" cy="320040"/>
+          </a:xfrm>
+          <a:prstGeom prst="rect">
+            <a:avLst/>
+          </a:prstGeom>
+          <a:noFill/>
+          <a:ln/>
+        </p:spPr>
+        <p:txBody>
+          <a:bodyPr wrap="square" rtlCol="0" anchor="ctr"/>
+          <a:lstStyle/>
+          <a:p>
+            <a:pPr marL="0" indent="0">
+              <a:buNone/>
+            </a:pPr>
+            <a:r>
+              <a:rPr lang="en-US" sz="900" dirty="0">
+                <a:solidFill>
+                  <a:srgbClr val="A7ADC0"/>
+                </a:solidFill>
+                <a:latin typeface="Calibri" pitchFamily="34" charset="0"/>
+                <a:ea typeface="Calibri" pitchFamily="34" charset="-122"/>
+                <a:cs typeface="Calibri" pitchFamily="34" charset="-120"/>
+              </a:rPr>
+              <a:t>Koi AI  ·  게임 사전 기획 요약</a:t>
+            </a:r>
+            <a:endParaRPr lang="en-US" sz="900" dirty="0"/>
+          </a:p>
+        </p:txBody>
+      </p:sp>
+    </p:spTree>
+  </p:cSld>
+  <p:clrMapOvr>
+    <a:masterClrMapping/>
+  </p:clrMapOvr>
+</p:sld>
+</file>
+
+<file path=ppt/slides/slide6.xml><?xml version="1.0" encoding="utf-8"?>
+<p:sld xmlns:a="http://schemas.openxmlformats.org/drawingml/2006/main" xmlns:r="http://schemas.openxmlformats.org/officeDocument/2006/relationships" xmlns:p="http://schemas.openxmlformats.org/presentationml/2006/main">
   <p:cSld name="Slide 4">
     <p:bg>
       <p:bgPr>
@@ -3734,7 +4838,7 @@
                 <a:ea typeface="Calibri" pitchFamily="34" charset="-122"/>
                 <a:cs typeface="Calibri" pitchFamily="34" charset="-120"/>
               </a:rPr>
-              <a:t>4 / 7</a:t>
+              <a:t>5 / 7</a:t>
             </a:r>
             <a:endParaRPr lang="en-US" sz="1100" dirty="0"/>
           </a:p>
@@ -4393,1110 +5497,6 @@
       <p:sp>
         <p:nvSpPr>
           <p:cNvPr id="21" name="Text 17"/>
-          <p:cNvSpPr/>
-          <p:nvPr/>
-        </p:nvSpPr>
-        <p:spPr>
-          <a:xfrm>
-            <a:off x="548640" y="6400800"/>
-            <a:ext cx="5486400" cy="320040"/>
-          </a:xfrm>
-          <a:prstGeom prst="rect">
-            <a:avLst/>
-          </a:prstGeom>
-          <a:noFill/>
-          <a:ln/>
-        </p:spPr>
-        <p:txBody>
-          <a:bodyPr wrap="square" rtlCol="0" anchor="ctr"/>
-          <a:lstStyle/>
-          <a:p>
-            <a:pPr marL="0" indent="0">
-              <a:buNone/>
-            </a:pPr>
-            <a:r>
-              <a:rPr lang="en-US" sz="900" dirty="0">
-                <a:solidFill>
-                  <a:srgbClr val="A7ADC0"/>
-                </a:solidFill>
-                <a:latin typeface="Calibri" pitchFamily="34" charset="0"/>
-                <a:ea typeface="Calibri" pitchFamily="34" charset="-122"/>
-                <a:cs typeface="Calibri" pitchFamily="34" charset="-120"/>
-              </a:rPr>
-              <a:t>Koi AI  ·  게임 사전 기획 요약</a:t>
-            </a:r>
-            <a:endParaRPr lang="en-US" sz="900" dirty="0"/>
-          </a:p>
-        </p:txBody>
-      </p:sp>
-    </p:spTree>
-  </p:cSld>
-  <p:clrMapOvr>
-    <a:masterClrMapping/>
-  </p:clrMapOvr>
-</p:sld>
-</file>
-
-<file path=ppt/slides/slide6.xml><?xml version="1.0" encoding="utf-8"?>
-<p:sld xmlns:a="http://schemas.openxmlformats.org/drawingml/2006/main" xmlns:r="http://schemas.openxmlformats.org/officeDocument/2006/relationships" xmlns:p="http://schemas.openxmlformats.org/presentationml/2006/main">
-  <p:cSld name="Slide 5">
-    <p:bg>
-      <p:bgPr>
-        <a:solidFill>
-          <a:srgbClr val="14171F"/>
-        </a:solidFill>
-        <a:effectLst/>
-      </p:bgPr>
-    </p:bg>
-    <p:spTree>
-      <p:nvGrpSpPr>
-        <p:cNvPr id="1" name=""/>
-        <p:cNvGrpSpPr/>
-        <p:nvPr/>
-      </p:nvGrpSpPr>
-      <p:grpSpPr>
-        <a:xfrm>
-          <a:off x="0" y="0"/>
-          <a:ext cx="0" cy="0"/>
-          <a:chOff x="0" y="0"/>
-          <a:chExt cx="0" cy="0"/>
-        </a:xfrm>
-      </p:grpSpPr>
-      <p:sp>
-        <p:nvSpPr>
-          <p:cNvPr id="2" name="Text 0"/>
-          <p:cNvSpPr/>
-          <p:nvPr/>
-        </p:nvSpPr>
-        <p:spPr>
-          <a:xfrm>
-            <a:off x="548640" y="384048"/>
-            <a:ext cx="5486400" cy="365760"/>
-          </a:xfrm>
-          <a:prstGeom prst="rect">
-            <a:avLst/>
-          </a:prstGeom>
-          <a:noFill/>
-          <a:ln/>
-        </p:spPr>
-        <p:txBody>
-          <a:bodyPr wrap="square" rtlCol="0" anchor="ctr"/>
-          <a:lstStyle/>
-          <a:p>
-            <a:pPr marL="0" indent="0">
-              <a:buNone/>
-            </a:pPr>
-            <a:r>
-              <a:rPr lang="en-US" sz="1100" b="1" kern="0" spc="200" dirty="0">
-                <a:solidFill>
-                  <a:srgbClr val="F2A65A"/>
-                </a:solidFill>
-                <a:latin typeface="Calibri" pitchFamily="34" charset="0"/>
-                <a:ea typeface="Calibri" pitchFamily="34" charset="-122"/>
-                <a:cs typeface="Calibri" pitchFamily="34" charset="-120"/>
-              </a:rPr>
-              <a:t>04  핵심 재미와 인게임 루프</a:t>
-            </a:r>
-            <a:endParaRPr lang="en-US" sz="1100" dirty="0"/>
-          </a:p>
-        </p:txBody>
-      </p:sp>
-      <p:sp>
-        <p:nvSpPr>
-          <p:cNvPr id="3" name="Text 1"/>
-          <p:cNvSpPr/>
-          <p:nvPr/>
-        </p:nvSpPr>
-        <p:spPr>
-          <a:xfrm>
-            <a:off x="11000232" y="384048"/>
-            <a:ext cx="731520" cy="365760"/>
-          </a:xfrm>
-          <a:prstGeom prst="rect">
-            <a:avLst/>
-          </a:prstGeom>
-          <a:noFill/>
-          <a:ln/>
-        </p:spPr>
-        <p:txBody>
-          <a:bodyPr wrap="square" rtlCol="0" anchor="ctr"/>
-          <a:lstStyle/>
-          <a:p>
-            <a:pPr marL="0" indent="0" algn="r">
-              <a:buNone/>
-            </a:pPr>
-            <a:r>
-              <a:rPr lang="en-US" sz="1100" dirty="0">
-                <a:solidFill>
-                  <a:srgbClr val="A7ADC0"/>
-                </a:solidFill>
-                <a:latin typeface="Calibri" pitchFamily="34" charset="0"/>
-                <a:ea typeface="Calibri" pitchFamily="34" charset="-122"/>
-                <a:cs typeface="Calibri" pitchFamily="34" charset="-120"/>
-              </a:rPr>
-              <a:t>5 / 7</a:t>
-            </a:r>
-            <a:endParaRPr lang="en-US" sz="1100" dirty="0"/>
-          </a:p>
-        </p:txBody>
-      </p:sp>
-      <p:sp>
-        <p:nvSpPr>
-          <p:cNvPr id="4" name="Text 2"/>
-          <p:cNvSpPr/>
-          <p:nvPr/>
-        </p:nvSpPr>
-        <p:spPr>
-          <a:xfrm>
-            <a:off x="548640" y="685800"/>
-            <a:ext cx="11091672" cy="822960"/>
-          </a:xfrm>
-          <a:prstGeom prst="rect">
-            <a:avLst/>
-          </a:prstGeom>
-          <a:noFill/>
-          <a:ln/>
-        </p:spPr>
-        <p:txBody>
-          <a:bodyPr wrap="square" lIns="0" tIns="0" rIns="0" bIns="0" rtlCol="0" anchor="ctr"/>
-          <a:lstStyle/>
-          <a:p>
-            <a:pPr marL="0" indent="0">
-              <a:buNone/>
-            </a:pPr>
-            <a:r>
-              <a:rPr lang="en-US" sz="3200" b="1" dirty="0">
-                <a:solidFill>
-                  <a:srgbClr val="F4F4F1"/>
-                </a:solidFill>
-                <a:latin typeface="Century Schoolbook" pitchFamily="34" charset="0"/>
-                <a:ea typeface="Century Schoolbook" pitchFamily="34" charset="-122"/>
-                <a:cs typeface="Century Schoolbook" pitchFamily="34" charset="-120"/>
-              </a:rPr>
-              <a:t>핵심 재미 &amp; 인게임 루프</a:t>
-            </a:r>
-            <a:endParaRPr lang="en-US" sz="3200" dirty="0"/>
-          </a:p>
-        </p:txBody>
-      </p:sp>
-      <p:sp>
-        <p:nvSpPr>
-          <p:cNvPr id="5" name="Shape 3"/>
-          <p:cNvSpPr/>
-          <p:nvPr/>
-        </p:nvSpPr>
-        <p:spPr>
-          <a:xfrm>
-            <a:off x="548640" y="1783080"/>
-            <a:ext cx="6537960" cy="1051560"/>
-          </a:xfrm>
-          <a:prstGeom prst="rect">
-            <a:avLst/>
-          </a:prstGeom>
-          <a:solidFill>
-            <a:srgbClr val="1D2230"/>
-          </a:solidFill>
-          <a:ln w="12700">
-            <a:solidFill>
-              <a:srgbClr val="252B3D"/>
-            </a:solidFill>
-            <a:prstDash val="solid"/>
-          </a:ln>
-        </p:spPr>
-      </p:sp>
-      <p:sp>
-        <p:nvSpPr>
-          <p:cNvPr id="6" name="Text 4"/>
-          <p:cNvSpPr/>
-          <p:nvPr/>
-        </p:nvSpPr>
-        <p:spPr>
-          <a:xfrm>
-            <a:off x="822960" y="1901952"/>
-            <a:ext cx="6035040" cy="822960"/>
-          </a:xfrm>
-          <a:prstGeom prst="rect">
-            <a:avLst/>
-          </a:prstGeom>
-          <a:noFill/>
-          <a:ln/>
-        </p:spPr>
-        <p:txBody>
-          <a:bodyPr wrap="square" rtlCol="0" anchor="ctr"/>
-          <a:lstStyle/>
-          <a:p>
-            <a:pPr marL="0" indent="0">
-              <a:lnSpc>
-                <a:spcPct val="125000"/>
-              </a:lnSpc>
-              <a:buNone/>
-            </a:pPr>
-            <a:r>
-              <a:rPr lang="en-US" sz="1350" dirty="0">
-                <a:solidFill>
-                  <a:srgbClr val="F4F4F1"/>
-                </a:solidFill>
-                <a:latin typeface="Calibri" pitchFamily="34" charset="0"/>
-                <a:ea typeface="Calibri" pitchFamily="34" charset="-122"/>
-                <a:cs typeface="Calibri" pitchFamily="34" charset="-120"/>
-              </a:rPr>
-              <a:t>적에게 발각되면 추격전이 벌어지는 긴장감 있는 잠입 플레이, 성장 이후에는 강해진 힘으로 적을 물리치는 화끈한 액션의 재미를 함께 선사합니다.</a:t>
-            </a:r>
-            <a:endParaRPr lang="en-US" sz="1350" dirty="0"/>
-          </a:p>
-        </p:txBody>
-      </p:sp>
-      <p:sp>
-        <p:nvSpPr>
-          <p:cNvPr id="7" name="Shape 5"/>
-          <p:cNvSpPr/>
-          <p:nvPr/>
-        </p:nvSpPr>
-        <p:spPr>
-          <a:xfrm>
-            <a:off x="548640" y="3200400"/>
-            <a:ext cx="365760" cy="365760"/>
-          </a:xfrm>
-          <a:prstGeom prst="ellipse">
-            <a:avLst/>
-          </a:prstGeom>
-          <a:solidFill>
-            <a:srgbClr val="252B3D"/>
-          </a:solidFill>
-          <a:ln w="19050">
-            <a:solidFill>
-              <a:srgbClr val="6FE0EE"/>
-            </a:solidFill>
-            <a:prstDash val="solid"/>
-          </a:ln>
-        </p:spPr>
-      </p:sp>
-      <p:sp>
-        <p:nvSpPr>
-          <p:cNvPr id="8" name="Text 6"/>
-          <p:cNvSpPr/>
-          <p:nvPr/>
-        </p:nvSpPr>
-        <p:spPr>
-          <a:xfrm>
-            <a:off x="548640" y="3200400"/>
-            <a:ext cx="365760" cy="365760"/>
-          </a:xfrm>
-          <a:prstGeom prst="rect">
-            <a:avLst/>
-          </a:prstGeom>
-          <a:noFill/>
-          <a:ln/>
-        </p:spPr>
-        <p:txBody>
-          <a:bodyPr wrap="square" lIns="0" tIns="0" rIns="0" bIns="0" rtlCol="0" anchor="ctr"/>
-          <a:lstStyle/>
-          <a:p>
-            <a:pPr marL="0" indent="0" algn="ctr">
-              <a:buNone/>
-            </a:pPr>
-            <a:r>
-              <a:rPr lang="en-US" sz="1600" b="1" dirty="0">
-                <a:solidFill>
-                  <a:srgbClr val="6FE0EE"/>
-                </a:solidFill>
-                <a:latin typeface="Calibri" pitchFamily="34" charset="0"/>
-                <a:ea typeface="Calibri" pitchFamily="34" charset="-122"/>
-                <a:cs typeface="Calibri" pitchFamily="34" charset="-120"/>
-              </a:rPr>
-              <a:t>1</a:t>
-            </a:r>
-            <a:endParaRPr lang="en-US" sz="1600" dirty="0"/>
-          </a:p>
-        </p:txBody>
-      </p:sp>
-      <p:sp>
-        <p:nvSpPr>
-          <p:cNvPr id="9" name="Text 7"/>
-          <p:cNvSpPr/>
-          <p:nvPr/>
-        </p:nvSpPr>
-        <p:spPr>
-          <a:xfrm>
-            <a:off x="1097280" y="3154680"/>
-            <a:ext cx="5943600" cy="502920"/>
-          </a:xfrm>
-          <a:prstGeom prst="rect">
-            <a:avLst/>
-          </a:prstGeom>
-          <a:noFill/>
-          <a:ln/>
-        </p:spPr>
-        <p:txBody>
-          <a:bodyPr wrap="square" rtlCol="0" anchor="ctr"/>
-          <a:lstStyle/>
-          <a:p>
-            <a:pPr marL="0" indent="0">
-              <a:buNone/>
-            </a:pPr>
-            <a:r>
-              <a:rPr lang="en-US" sz="1300" dirty="0">
-                <a:solidFill>
-                  <a:srgbClr val="F4F4F1"/>
-                </a:solidFill>
-                <a:latin typeface="Calibri" pitchFamily="34" charset="0"/>
-                <a:ea typeface="Calibri" pitchFamily="34" charset="-122"/>
-                <a:cs typeface="Calibri" pitchFamily="34" charset="-120"/>
-              </a:rPr>
-              <a:t>미션 수행 (상자·부품 탐색)</a:t>
-            </a:r>
-            <a:endParaRPr lang="en-US" sz="1300" dirty="0"/>
-          </a:p>
-        </p:txBody>
-      </p:sp>
-      <p:sp>
-        <p:nvSpPr>
-          <p:cNvPr id="11" name="Shape 9"/>
-          <p:cNvSpPr/>
-          <p:nvPr/>
-        </p:nvSpPr>
-        <p:spPr>
-          <a:xfrm>
-            <a:off x="548640" y="3767328"/>
-            <a:ext cx="365760" cy="365760"/>
-          </a:xfrm>
-          <a:prstGeom prst="ellipse">
-            <a:avLst/>
-          </a:prstGeom>
-          <a:solidFill>
-            <a:srgbClr val="252B3D"/>
-          </a:solidFill>
-          <a:ln w="19050">
-            <a:solidFill>
-              <a:srgbClr val="6FE0EE"/>
-            </a:solidFill>
-            <a:prstDash val="solid"/>
-          </a:ln>
-        </p:spPr>
-      </p:sp>
-      <p:sp>
-        <p:nvSpPr>
-          <p:cNvPr id="12" name="Text 10"/>
-          <p:cNvSpPr/>
-          <p:nvPr/>
-        </p:nvSpPr>
-        <p:spPr>
-          <a:xfrm>
-            <a:off x="548640" y="3767328"/>
-            <a:ext cx="365760" cy="365760"/>
-          </a:xfrm>
-          <a:prstGeom prst="rect">
-            <a:avLst/>
-          </a:prstGeom>
-          <a:noFill/>
-          <a:ln/>
-        </p:spPr>
-        <p:txBody>
-          <a:bodyPr wrap="square" lIns="0" tIns="0" rIns="0" bIns="0" rtlCol="0" anchor="ctr"/>
-          <a:lstStyle/>
-          <a:p>
-            <a:pPr marL="0" indent="0" algn="ctr">
-              <a:buNone/>
-            </a:pPr>
-            <a:r>
-              <a:rPr lang="en-US" sz="1600" b="1" dirty="0">
-                <a:solidFill>
-                  <a:srgbClr val="6FE0EE"/>
-                </a:solidFill>
-                <a:latin typeface="Calibri" pitchFamily="34" charset="0"/>
-                <a:ea typeface="Calibri" pitchFamily="34" charset="-122"/>
-                <a:cs typeface="Calibri" pitchFamily="34" charset="-120"/>
-              </a:rPr>
-              <a:t>2</a:t>
-            </a:r>
-            <a:endParaRPr lang="en-US" sz="1600" dirty="0"/>
-          </a:p>
-        </p:txBody>
-      </p:sp>
-      <p:sp>
-        <p:nvSpPr>
-          <p:cNvPr id="13" name="Text 11"/>
-          <p:cNvSpPr/>
-          <p:nvPr/>
-        </p:nvSpPr>
-        <p:spPr>
-          <a:xfrm>
-            <a:off x="1097280" y="3721608"/>
-            <a:ext cx="5943600" cy="502920"/>
-          </a:xfrm>
-          <a:prstGeom prst="rect">
-            <a:avLst/>
-          </a:prstGeom>
-          <a:noFill/>
-          <a:ln/>
-        </p:spPr>
-        <p:txBody>
-          <a:bodyPr wrap="square" rtlCol="0" anchor="ctr"/>
-          <a:lstStyle/>
-          <a:p>
-            <a:pPr marL="0" indent="0">
-              <a:buNone/>
-            </a:pPr>
-            <a:r>
-              <a:rPr lang="en-US" sz="1300" dirty="0">
-                <a:solidFill>
-                  <a:srgbClr val="F4F4F1"/>
-                </a:solidFill>
-                <a:latin typeface="Calibri" pitchFamily="34" charset="0"/>
-                <a:ea typeface="Calibri" pitchFamily="34" charset="-122"/>
-                <a:cs typeface="Calibri" pitchFamily="34" charset="-120"/>
-              </a:rPr>
-              <a:t>발각 시 </a:t>
-            </a:r>
-            <a:r>
-              <a:rPr lang="en-US" sz="1300" dirty="0" err="1">
-                <a:solidFill>
-                  <a:srgbClr val="F4F4F1"/>
-                </a:solidFill>
-                <a:latin typeface="Calibri" pitchFamily="34" charset="0"/>
-                <a:ea typeface="Calibri" pitchFamily="34" charset="-122"/>
-                <a:cs typeface="Calibri" pitchFamily="34" charset="-120"/>
-              </a:rPr>
-              <a:t>추격전</a:t>
-            </a:r>
-            <a:r>
-              <a:rPr lang="en-US" sz="1300" dirty="0">
-                <a:solidFill>
-                  <a:srgbClr val="F4F4F1"/>
-                </a:solidFill>
-                <a:latin typeface="Calibri" pitchFamily="34" charset="0"/>
-                <a:ea typeface="Calibri" pitchFamily="34" charset="-122"/>
-                <a:cs typeface="Calibri" pitchFamily="34" charset="-120"/>
-              </a:rPr>
-              <a:t> (</a:t>
-            </a:r>
-            <a:r>
-              <a:rPr lang="en-US" sz="1300" dirty="0" err="1">
-                <a:solidFill>
-                  <a:srgbClr val="F4F4F1"/>
-                </a:solidFill>
-                <a:latin typeface="Calibri" pitchFamily="34" charset="0"/>
-                <a:ea typeface="Calibri" pitchFamily="34" charset="-122"/>
-                <a:cs typeface="Calibri" pitchFamily="34" charset="-120"/>
-              </a:rPr>
-              <a:t>미발각</a:t>
-            </a:r>
-            <a:r>
-              <a:rPr lang="en-US" sz="1300" dirty="0">
-                <a:solidFill>
-                  <a:srgbClr val="F4F4F1"/>
-                </a:solidFill>
-                <a:latin typeface="Calibri" pitchFamily="34" charset="0"/>
-                <a:ea typeface="Calibri" pitchFamily="34" charset="-122"/>
-                <a:cs typeface="Calibri" pitchFamily="34" charset="-120"/>
-              </a:rPr>
-              <a:t> 시 </a:t>
-            </a:r>
-            <a:r>
-              <a:rPr lang="en-US" sz="1300" dirty="0" err="1">
-                <a:solidFill>
-                  <a:srgbClr val="F4F4F1"/>
-                </a:solidFill>
-                <a:latin typeface="Calibri" pitchFamily="34" charset="0"/>
-                <a:ea typeface="Calibri" pitchFamily="34" charset="-122"/>
-                <a:cs typeface="Calibri" pitchFamily="34" charset="-120"/>
-              </a:rPr>
-              <a:t>은밀한</a:t>
-            </a:r>
-            <a:r>
-              <a:rPr lang="en-US" sz="1300" dirty="0">
-                <a:solidFill>
-                  <a:srgbClr val="F4F4F1"/>
-                </a:solidFill>
-                <a:latin typeface="Calibri" pitchFamily="34" charset="0"/>
-                <a:ea typeface="Calibri" pitchFamily="34" charset="-122"/>
-                <a:cs typeface="Calibri" pitchFamily="34" charset="-120"/>
-              </a:rPr>
-              <a:t> </a:t>
-            </a:r>
-            <a:r>
-              <a:rPr lang="en-US" sz="1300" dirty="0" err="1">
-                <a:solidFill>
-                  <a:srgbClr val="F4F4F1"/>
-                </a:solidFill>
-                <a:latin typeface="Calibri" pitchFamily="34" charset="0"/>
-                <a:ea typeface="Calibri" pitchFamily="34" charset="-122"/>
-                <a:cs typeface="Calibri" pitchFamily="34" charset="-120"/>
-              </a:rPr>
-              <a:t>파밍</a:t>
-            </a:r>
-            <a:r>
-              <a:rPr lang="en-US" sz="1300" dirty="0">
-                <a:solidFill>
-                  <a:srgbClr val="F4F4F1"/>
-                </a:solidFill>
-                <a:latin typeface="Calibri" pitchFamily="34" charset="0"/>
-                <a:ea typeface="Calibri" pitchFamily="34" charset="-122"/>
-                <a:cs typeface="Calibri" pitchFamily="34" charset="-120"/>
-              </a:rPr>
-              <a:t>)</a:t>
-            </a:r>
-            <a:endParaRPr lang="en-US" sz="1300" dirty="0"/>
-          </a:p>
-        </p:txBody>
-      </p:sp>
-      <p:sp>
-        <p:nvSpPr>
-          <p:cNvPr id="15" name="Shape 13"/>
-          <p:cNvSpPr/>
-          <p:nvPr/>
-        </p:nvSpPr>
-        <p:spPr>
-          <a:xfrm>
-            <a:off x="548640" y="4334256"/>
-            <a:ext cx="365760" cy="365760"/>
-          </a:xfrm>
-          <a:prstGeom prst="ellipse">
-            <a:avLst/>
-          </a:prstGeom>
-          <a:solidFill>
-            <a:srgbClr val="252B3D"/>
-          </a:solidFill>
-          <a:ln w="19050">
-            <a:solidFill>
-              <a:srgbClr val="6FE0EE"/>
-            </a:solidFill>
-            <a:prstDash val="solid"/>
-          </a:ln>
-        </p:spPr>
-      </p:sp>
-      <p:sp>
-        <p:nvSpPr>
-          <p:cNvPr id="16" name="Text 14"/>
-          <p:cNvSpPr/>
-          <p:nvPr/>
-        </p:nvSpPr>
-        <p:spPr>
-          <a:xfrm>
-            <a:off x="548640" y="4334256"/>
-            <a:ext cx="365760" cy="365760"/>
-          </a:xfrm>
-          <a:prstGeom prst="rect">
-            <a:avLst/>
-          </a:prstGeom>
-          <a:noFill/>
-          <a:ln/>
-        </p:spPr>
-        <p:txBody>
-          <a:bodyPr wrap="square" lIns="0" tIns="0" rIns="0" bIns="0" rtlCol="0" anchor="ctr"/>
-          <a:lstStyle/>
-          <a:p>
-            <a:pPr marL="0" indent="0" algn="ctr">
-              <a:buNone/>
-            </a:pPr>
-            <a:r>
-              <a:rPr lang="en-US" sz="1600" b="1" dirty="0">
-                <a:solidFill>
-                  <a:srgbClr val="6FE0EE"/>
-                </a:solidFill>
-                <a:latin typeface="Calibri" pitchFamily="34" charset="0"/>
-                <a:ea typeface="Calibri" pitchFamily="34" charset="-122"/>
-                <a:cs typeface="Calibri" pitchFamily="34" charset="-120"/>
-              </a:rPr>
-              <a:t>3</a:t>
-            </a:r>
-            <a:endParaRPr lang="en-US" sz="1600" dirty="0"/>
-          </a:p>
-        </p:txBody>
-      </p:sp>
-      <p:sp>
-        <p:nvSpPr>
-          <p:cNvPr id="17" name="Text 15"/>
-          <p:cNvSpPr/>
-          <p:nvPr/>
-        </p:nvSpPr>
-        <p:spPr>
-          <a:xfrm>
-            <a:off x="1097280" y="4288536"/>
-            <a:ext cx="5943600" cy="502920"/>
-          </a:xfrm>
-          <a:prstGeom prst="rect">
-            <a:avLst/>
-          </a:prstGeom>
-          <a:noFill/>
-          <a:ln/>
-        </p:spPr>
-        <p:txBody>
-          <a:bodyPr wrap="square" rtlCol="0" anchor="ctr"/>
-          <a:lstStyle/>
-          <a:p>
-            <a:pPr marL="0" indent="0">
-              <a:buNone/>
-            </a:pPr>
-            <a:r>
-              <a:rPr lang="en-US" sz="1300" dirty="0">
-                <a:solidFill>
-                  <a:srgbClr val="F4F4F1"/>
-                </a:solidFill>
-                <a:latin typeface="Calibri" pitchFamily="34" charset="0"/>
-                <a:ea typeface="Calibri" pitchFamily="34" charset="-122"/>
-                <a:cs typeface="Calibri" pitchFamily="34" charset="-120"/>
-              </a:rPr>
-              <a:t>적 처치 &amp; Roi </a:t>
-            </a:r>
-            <a:r>
-              <a:rPr lang="en-US" sz="1300" dirty="0" err="1">
-                <a:solidFill>
-                  <a:srgbClr val="F4F4F1"/>
-                </a:solidFill>
-                <a:latin typeface="Calibri" pitchFamily="34" charset="0"/>
-                <a:ea typeface="Calibri" pitchFamily="34" charset="-122"/>
-                <a:cs typeface="Calibri" pitchFamily="34" charset="-120"/>
-              </a:rPr>
-              <a:t>부품</a:t>
-            </a:r>
-            <a:r>
-              <a:rPr lang="en-US" sz="1300" dirty="0">
-                <a:solidFill>
-                  <a:srgbClr val="F4F4F1"/>
-                </a:solidFill>
-                <a:latin typeface="Calibri" pitchFamily="34" charset="0"/>
-                <a:ea typeface="Calibri" pitchFamily="34" charset="-122"/>
-                <a:cs typeface="Calibri" pitchFamily="34" charset="-120"/>
-              </a:rPr>
-              <a:t> </a:t>
-            </a:r>
-            <a:r>
-              <a:rPr lang="en-US" sz="1300" dirty="0" err="1">
-                <a:solidFill>
-                  <a:srgbClr val="F4F4F1"/>
-                </a:solidFill>
-                <a:latin typeface="Calibri" pitchFamily="34" charset="0"/>
-                <a:ea typeface="Calibri" pitchFamily="34" charset="-122"/>
-                <a:cs typeface="Calibri" pitchFamily="34" charset="-120"/>
-              </a:rPr>
-              <a:t>구출</a:t>
-            </a:r>
-            <a:r>
-              <a:rPr lang="en-US" sz="1300" dirty="0">
-                <a:solidFill>
-                  <a:srgbClr val="F4F4F1"/>
-                </a:solidFill>
-                <a:latin typeface="Calibri" pitchFamily="34" charset="0"/>
-                <a:ea typeface="Calibri" pitchFamily="34" charset="-122"/>
-                <a:cs typeface="Calibri" pitchFamily="34" charset="-120"/>
-              </a:rPr>
-              <a:t> &amp; </a:t>
-            </a:r>
-            <a:r>
-              <a:rPr lang="ko-KR" altLang="en-US" sz="1300" dirty="0">
-                <a:solidFill>
-                  <a:srgbClr val="F4F4F1"/>
-                </a:solidFill>
-                <a:latin typeface="Calibri" pitchFamily="34" charset="0"/>
-                <a:ea typeface="Calibri" pitchFamily="34" charset="-122"/>
-                <a:cs typeface="Calibri" pitchFamily="34" charset="-120"/>
-              </a:rPr>
-              <a:t>산소 발생기 파괴</a:t>
-            </a:r>
-            <a:endParaRPr lang="en-US" sz="1300" dirty="0"/>
-          </a:p>
-        </p:txBody>
-      </p:sp>
-      <p:sp>
-        <p:nvSpPr>
-          <p:cNvPr id="19" name="Shape 17"/>
-          <p:cNvSpPr/>
-          <p:nvPr/>
-        </p:nvSpPr>
-        <p:spPr>
-          <a:xfrm>
-            <a:off x="548640" y="4901184"/>
-            <a:ext cx="365760" cy="365760"/>
-          </a:xfrm>
-          <a:prstGeom prst="ellipse">
-            <a:avLst/>
-          </a:prstGeom>
-          <a:solidFill>
-            <a:srgbClr val="252B3D"/>
-          </a:solidFill>
-          <a:ln w="19050">
-            <a:solidFill>
-              <a:srgbClr val="6FE0EE"/>
-            </a:solidFill>
-            <a:prstDash val="solid"/>
-          </a:ln>
-        </p:spPr>
-      </p:sp>
-      <p:sp>
-        <p:nvSpPr>
-          <p:cNvPr id="20" name="Text 18"/>
-          <p:cNvSpPr/>
-          <p:nvPr/>
-        </p:nvSpPr>
-        <p:spPr>
-          <a:xfrm>
-            <a:off x="548640" y="4901184"/>
-            <a:ext cx="365760" cy="365760"/>
-          </a:xfrm>
-          <a:prstGeom prst="rect">
-            <a:avLst/>
-          </a:prstGeom>
-          <a:noFill/>
-          <a:ln/>
-        </p:spPr>
-        <p:txBody>
-          <a:bodyPr wrap="square" lIns="0" tIns="0" rIns="0" bIns="0" rtlCol="0" anchor="ctr"/>
-          <a:lstStyle/>
-          <a:p>
-            <a:pPr marL="0" indent="0" algn="ctr">
-              <a:buNone/>
-            </a:pPr>
-            <a:r>
-              <a:rPr lang="en-US" sz="1600" b="1" dirty="0">
-                <a:solidFill>
-                  <a:srgbClr val="6FE0EE"/>
-                </a:solidFill>
-                <a:latin typeface="Calibri" pitchFamily="34" charset="0"/>
-                <a:ea typeface="Calibri" pitchFamily="34" charset="-122"/>
-                <a:cs typeface="Calibri" pitchFamily="34" charset="-120"/>
-              </a:rPr>
-              <a:t>4</a:t>
-            </a:r>
-            <a:endParaRPr lang="en-US" sz="1600" dirty="0"/>
-          </a:p>
-        </p:txBody>
-      </p:sp>
-      <p:sp>
-        <p:nvSpPr>
-          <p:cNvPr id="21" name="Text 19"/>
-          <p:cNvSpPr/>
-          <p:nvPr/>
-        </p:nvSpPr>
-        <p:spPr>
-          <a:xfrm>
-            <a:off x="1097280" y="4855464"/>
-            <a:ext cx="5943600" cy="502920"/>
-          </a:xfrm>
-          <a:prstGeom prst="rect">
-            <a:avLst/>
-          </a:prstGeom>
-          <a:noFill/>
-          <a:ln/>
-        </p:spPr>
-        <p:txBody>
-          <a:bodyPr wrap="square" rtlCol="0" anchor="ctr"/>
-          <a:lstStyle/>
-          <a:p>
-            <a:pPr marL="0" indent="0">
-              <a:buNone/>
-            </a:pPr>
-            <a:r>
-              <a:rPr lang="en-US" sz="1300" dirty="0" err="1">
-                <a:solidFill>
-                  <a:srgbClr val="F4F4F1"/>
-                </a:solidFill>
-                <a:latin typeface="Calibri" pitchFamily="34" charset="0"/>
-                <a:ea typeface="Calibri" pitchFamily="34" charset="-122"/>
-                <a:cs typeface="Calibri" pitchFamily="34" charset="-120"/>
-              </a:rPr>
-              <a:t>보스</a:t>
-            </a:r>
-            <a:r>
-              <a:rPr lang="en-US" sz="1300" dirty="0">
-                <a:solidFill>
-                  <a:srgbClr val="F4F4F1"/>
-                </a:solidFill>
-                <a:latin typeface="Calibri" pitchFamily="34" charset="0"/>
-                <a:ea typeface="Calibri" pitchFamily="34" charset="-122"/>
-                <a:cs typeface="Calibri" pitchFamily="34" charset="-120"/>
-              </a:rPr>
-              <a:t> 처치</a:t>
-            </a:r>
-            <a:endParaRPr lang="en-US" sz="1300" dirty="0"/>
-          </a:p>
-        </p:txBody>
-      </p:sp>
-      <p:sp>
-        <p:nvSpPr>
-          <p:cNvPr id="23" name="Shape 21"/>
-          <p:cNvSpPr/>
-          <p:nvPr/>
-        </p:nvSpPr>
-        <p:spPr>
-          <a:xfrm>
-            <a:off x="548640" y="5468112"/>
-            <a:ext cx="365760" cy="365760"/>
-          </a:xfrm>
-          <a:prstGeom prst="ellipse">
-            <a:avLst/>
-          </a:prstGeom>
-          <a:solidFill>
-            <a:srgbClr val="252B3D"/>
-          </a:solidFill>
-          <a:ln w="19050">
-            <a:solidFill>
-              <a:srgbClr val="6FE0EE"/>
-            </a:solidFill>
-            <a:prstDash val="solid"/>
-          </a:ln>
-        </p:spPr>
-      </p:sp>
-      <p:sp>
-        <p:nvSpPr>
-          <p:cNvPr id="24" name="Text 22"/>
-          <p:cNvSpPr/>
-          <p:nvPr/>
-        </p:nvSpPr>
-        <p:spPr>
-          <a:xfrm>
-            <a:off x="548640" y="5468112"/>
-            <a:ext cx="365760" cy="365760"/>
-          </a:xfrm>
-          <a:prstGeom prst="rect">
-            <a:avLst/>
-          </a:prstGeom>
-          <a:noFill/>
-          <a:ln/>
-        </p:spPr>
-        <p:txBody>
-          <a:bodyPr wrap="square" lIns="0" tIns="0" rIns="0" bIns="0" rtlCol="0" anchor="ctr"/>
-          <a:lstStyle/>
-          <a:p>
-            <a:pPr marL="0" indent="0" algn="ctr">
-              <a:buNone/>
-            </a:pPr>
-            <a:r>
-              <a:rPr lang="en-US" sz="1600" b="1" dirty="0">
-                <a:solidFill>
-                  <a:srgbClr val="6FE0EE"/>
-                </a:solidFill>
-                <a:latin typeface="Calibri" pitchFamily="34" charset="0"/>
-                <a:ea typeface="Calibri" pitchFamily="34" charset="-122"/>
-                <a:cs typeface="Calibri" pitchFamily="34" charset="-120"/>
-              </a:rPr>
-              <a:t>5</a:t>
-            </a:r>
-            <a:endParaRPr lang="en-US" sz="1600" dirty="0"/>
-          </a:p>
-        </p:txBody>
-      </p:sp>
-      <p:sp>
-        <p:nvSpPr>
-          <p:cNvPr id="25" name="Text 23"/>
-          <p:cNvSpPr/>
-          <p:nvPr/>
-        </p:nvSpPr>
-        <p:spPr>
-          <a:xfrm>
-            <a:off x="1097280" y="5422392"/>
-            <a:ext cx="5943600" cy="502920"/>
-          </a:xfrm>
-          <a:prstGeom prst="rect">
-            <a:avLst/>
-          </a:prstGeom>
-          <a:noFill/>
-          <a:ln/>
-        </p:spPr>
-        <p:txBody>
-          <a:bodyPr wrap="square" rtlCol="0" anchor="ctr"/>
-          <a:lstStyle/>
-          <a:p>
-            <a:pPr marL="0" indent="0">
-              <a:buNone/>
-            </a:pPr>
-            <a:r>
-              <a:rPr lang="en-US" sz="1300" dirty="0" err="1">
-                <a:solidFill>
-                  <a:srgbClr val="F4F4F1"/>
-                </a:solidFill>
-                <a:latin typeface="Calibri" pitchFamily="34" charset="0"/>
-                <a:ea typeface="Calibri" pitchFamily="34" charset="-122"/>
-                <a:cs typeface="Calibri" pitchFamily="34" charset="-120"/>
-              </a:rPr>
-              <a:t>엔딩</a:t>
-            </a:r>
-            <a:r>
-              <a:rPr lang="en-US" sz="1300" dirty="0">
-                <a:solidFill>
-                  <a:srgbClr val="F4F4F1"/>
-                </a:solidFill>
-                <a:latin typeface="Calibri" pitchFamily="34" charset="0"/>
-                <a:ea typeface="Calibri" pitchFamily="34" charset="-122"/>
-                <a:cs typeface="Calibri" pitchFamily="34" charset="-120"/>
-              </a:rPr>
-              <a:t> </a:t>
-            </a:r>
-            <a:r>
-              <a:rPr lang="ko-KR" altLang="en-US" sz="1300" dirty="0">
-                <a:solidFill>
-                  <a:srgbClr val="F4F4F1"/>
-                </a:solidFill>
-                <a:latin typeface="Calibri" pitchFamily="34" charset="0"/>
-                <a:ea typeface="Calibri" pitchFamily="34" charset="-122"/>
-                <a:cs typeface="Calibri" pitchFamily="34" charset="-120"/>
-              </a:rPr>
-              <a:t>지점 이동 </a:t>
-            </a:r>
-            <a:r>
-              <a:rPr lang="en-US" altLang="ko-KR" sz="1300" dirty="0">
-                <a:solidFill>
-                  <a:srgbClr val="F4F4F1"/>
-                </a:solidFill>
-                <a:latin typeface="Calibri" pitchFamily="34" charset="0"/>
-                <a:ea typeface="Calibri" pitchFamily="34" charset="-122"/>
-                <a:cs typeface="Calibri" pitchFamily="34" charset="-120"/>
-              </a:rPr>
-              <a:t>&amp; </a:t>
-            </a:r>
-            <a:r>
-              <a:rPr lang="ko-KR" altLang="en-US" sz="1300" dirty="0">
-                <a:solidFill>
-                  <a:srgbClr val="F4F4F1"/>
-                </a:solidFill>
-                <a:latin typeface="Calibri" pitchFamily="34" charset="0"/>
-                <a:ea typeface="Calibri" pitchFamily="34" charset="-122"/>
-                <a:cs typeface="Calibri" pitchFamily="34" charset="-120"/>
-              </a:rPr>
-              <a:t>엔딩 크레딧</a:t>
-            </a:r>
-            <a:endParaRPr lang="en-US" sz="1300" dirty="0"/>
-          </a:p>
-        </p:txBody>
-      </p:sp>
-      <p:pic>
-        <p:nvPicPr>
-          <p:cNvPr id="26" name="Image 0" descr="assets/ship_out.jpg"/>
-          <p:cNvPicPr>
-            <a:picLocks noChangeAspect="1"/>
-          </p:cNvPicPr>
-          <p:nvPr/>
-        </p:nvPicPr>
-        <p:blipFill>
-          <a:blip r:embed="rId3"/>
-          <a:srcRect/>
-          <a:stretch/>
-        </p:blipFill>
-        <p:spPr>
-          <a:xfrm>
-            <a:off x="7452360" y="1783080"/>
-            <a:ext cx="4206240" cy="2148840"/>
-          </a:xfrm>
-          <a:prstGeom prst="rect">
-            <a:avLst/>
-          </a:prstGeom>
-        </p:spPr>
-      </p:pic>
-      <p:sp>
-        <p:nvSpPr>
-          <p:cNvPr id="27" name="Text 24"/>
-          <p:cNvSpPr/>
-          <p:nvPr/>
-        </p:nvSpPr>
-        <p:spPr>
-          <a:xfrm>
-            <a:off x="7452360" y="3959352"/>
-            <a:ext cx="4206240" cy="274320"/>
-          </a:xfrm>
-          <a:prstGeom prst="rect">
-            <a:avLst/>
-          </a:prstGeom>
-          <a:noFill/>
-          <a:ln/>
-        </p:spPr>
-        <p:txBody>
-          <a:bodyPr wrap="square" rtlCol="0" anchor="ctr"/>
-          <a:lstStyle/>
-          <a:p>
-            <a:pPr marL="0" indent="0">
-              <a:buNone/>
-            </a:pPr>
-            <a:r>
-              <a:rPr lang="en-US" sz="1000" i="1" dirty="0" err="1">
-                <a:solidFill>
-                  <a:srgbClr val="A7ADC0"/>
-                </a:solidFill>
-                <a:latin typeface="Calibri" pitchFamily="34" charset="0"/>
-                <a:ea typeface="Calibri" pitchFamily="34" charset="-122"/>
-                <a:cs typeface="Calibri" pitchFamily="34" charset="-120"/>
-              </a:rPr>
-              <a:t>대형</a:t>
-            </a:r>
-            <a:r>
-              <a:rPr lang="en-US" sz="1000" i="1" dirty="0">
-                <a:solidFill>
-                  <a:srgbClr val="A7ADC0"/>
-                </a:solidFill>
-                <a:latin typeface="Calibri" pitchFamily="34" charset="0"/>
-                <a:ea typeface="Calibri" pitchFamily="34" charset="-122"/>
-                <a:cs typeface="Calibri" pitchFamily="34" charset="-120"/>
-              </a:rPr>
-              <a:t> 우주선 (외부)</a:t>
-            </a:r>
-            <a:endParaRPr lang="en-US" sz="1000" dirty="0"/>
-          </a:p>
-        </p:txBody>
-      </p:sp>
-      <p:pic>
-        <p:nvPicPr>
-          <p:cNvPr id="28" name="Image 1" descr="assets/ship_in.jpg"/>
-          <p:cNvPicPr>
-            <a:picLocks noChangeAspect="1"/>
-          </p:cNvPicPr>
-          <p:nvPr/>
-        </p:nvPicPr>
-        <p:blipFill>
-          <a:blip r:embed="rId4"/>
-          <a:srcRect/>
-          <a:stretch/>
-        </p:blipFill>
-        <p:spPr>
-          <a:xfrm>
-            <a:off x="7452360" y="4343400"/>
-            <a:ext cx="4206240" cy="1783080"/>
-          </a:xfrm>
-          <a:prstGeom prst="rect">
-            <a:avLst/>
-          </a:prstGeom>
-        </p:spPr>
-      </p:pic>
-      <p:sp>
-        <p:nvSpPr>
-          <p:cNvPr id="29" name="Text 25"/>
-          <p:cNvSpPr/>
-          <p:nvPr/>
-        </p:nvSpPr>
-        <p:spPr>
-          <a:xfrm>
-            <a:off x="7452360" y="6153912"/>
-            <a:ext cx="4206240" cy="274320"/>
-          </a:xfrm>
-          <a:prstGeom prst="rect">
-            <a:avLst/>
-          </a:prstGeom>
-          <a:noFill/>
-          <a:ln/>
-        </p:spPr>
-        <p:txBody>
-          <a:bodyPr wrap="square" rtlCol="0" anchor="ctr"/>
-          <a:lstStyle/>
-          <a:p>
-            <a:pPr marL="0" indent="0">
-              <a:buNone/>
-            </a:pPr>
-            <a:r>
-              <a:rPr lang="en-US" sz="1000" i="1" dirty="0">
-                <a:solidFill>
-                  <a:srgbClr val="A7ADC0"/>
-                </a:solidFill>
-                <a:latin typeface="Calibri" pitchFamily="34" charset="0"/>
-                <a:ea typeface="Calibri" pitchFamily="34" charset="-122"/>
-                <a:cs typeface="Calibri" pitchFamily="34" charset="-120"/>
-              </a:rPr>
-              <a:t>우주선 내부 — 3개 층으로 구성</a:t>
-            </a:r>
-            <a:endParaRPr lang="en-US" sz="1000" dirty="0"/>
-          </a:p>
-        </p:txBody>
-      </p:sp>
-      <p:sp>
-        <p:nvSpPr>
-          <p:cNvPr id="30" name="Text 26"/>
           <p:cNvSpPr/>
           <p:nvPr/>
         </p:nvSpPr>
